--- a/docs/songs/majesty.pptx
+++ b/docs/songs/majesty.pptx
@@ -4,15 +4,10 @@
   <p:sldMasterIdLst>
     <p:sldMasterId id="2147483648" r:id="rId1"/>
   </p:sldMasterIdLst>
-  <p:notesMasterIdLst>
-    <p:notesMasterId r:id="rId7"/>
-  </p:notesMasterIdLst>
   <p:sldIdLst>
-    <p:sldId id="1224" r:id="rId2"/>
-    <p:sldId id="1223" r:id="rId3"/>
-    <p:sldId id="1226" r:id="rId4"/>
-    <p:sldId id="1225" r:id="rId5"/>
-    <p:sldId id="1227" r:id="rId6"/>
+    <p:sldId id="518" r:id="rId2"/>
+    <p:sldId id="519" r:id="rId3"/>
+    <p:sldId id="520" r:id="rId4"/>
   </p:sldIdLst>
   <p:sldSz cx="9144000" cy="6858000" type="screen4x3"/>
   <p:notesSz cx="6858000" cy="9144000"/>
@@ -130,440 +125,6 @@
 </p:presentation>
 </file>
 
-<file path=ppt/notesMasters/notesMaster1.xml><?xml version="1.0" encoding="utf-8"?>
-<p:notesMaster xmlns:a="http://schemas.openxmlformats.org/drawingml/2006/main" xmlns:r="http://schemas.openxmlformats.org/officeDocument/2006/relationships" xmlns:p="http://schemas.openxmlformats.org/presentationml/2006/main">
-  <p:cSld>
-    <p:bg>
-      <p:bgRef idx="1001">
-        <a:schemeClr val="bg1"/>
-      </p:bgRef>
-    </p:bg>
-    <p:spTree>
-      <p:nvGrpSpPr>
-        <p:cNvPr id="1" name=""/>
-        <p:cNvGrpSpPr/>
-        <p:nvPr/>
-      </p:nvGrpSpPr>
-      <p:grpSpPr>
-        <a:xfrm>
-          <a:off x="0" y="0"/>
-          <a:ext cx="0" cy="0"/>
-          <a:chOff x="0" y="0"/>
-          <a:chExt cx="0" cy="0"/>
-        </a:xfrm>
-      </p:grpSpPr>
-      <p:sp>
-        <p:nvSpPr>
-          <p:cNvPr id="2" name="Header Placeholder 1"/>
-          <p:cNvSpPr>
-            <a:spLocks noGrp="1"/>
-          </p:cNvSpPr>
-          <p:nvPr>
-            <p:ph type="hdr" sz="quarter"/>
-          </p:nvPr>
-        </p:nvSpPr>
-        <p:spPr>
-          <a:xfrm>
-            <a:off x="0" y="0"/>
-            <a:ext cx="2971800" cy="458788"/>
-          </a:xfrm>
-          <a:prstGeom prst="rect">
-            <a:avLst/>
-          </a:prstGeom>
-        </p:spPr>
-        <p:txBody>
-          <a:bodyPr vert="horz" lIns="91440" tIns="45720" rIns="91440" bIns="45720" rtlCol="0"/>
-          <a:lstStyle>
-            <a:lvl1pPr algn="l">
-              <a:defRPr sz="1200"/>
-            </a:lvl1pPr>
-          </a:lstStyle>
-          <a:p>
-            <a:endParaRPr lang="en-GB"/>
-          </a:p>
-        </p:txBody>
-      </p:sp>
-      <p:sp>
-        <p:nvSpPr>
-          <p:cNvPr id="3" name="Date Placeholder 2"/>
-          <p:cNvSpPr>
-            <a:spLocks noGrp="1"/>
-          </p:cNvSpPr>
-          <p:nvPr>
-            <p:ph type="dt" idx="1"/>
-          </p:nvPr>
-        </p:nvSpPr>
-        <p:spPr>
-          <a:xfrm>
-            <a:off x="3884613" y="0"/>
-            <a:ext cx="2971800" cy="458788"/>
-          </a:xfrm>
-          <a:prstGeom prst="rect">
-            <a:avLst/>
-          </a:prstGeom>
-        </p:spPr>
-        <p:txBody>
-          <a:bodyPr vert="horz" lIns="91440" tIns="45720" rIns="91440" bIns="45720" rtlCol="0"/>
-          <a:lstStyle>
-            <a:lvl1pPr algn="r">
-              <a:defRPr sz="1200"/>
-            </a:lvl1pPr>
-          </a:lstStyle>
-          <a:p>
-            <a:fld id="{C57EAEFC-A9C7-464E-BE3F-33D4DD72E122}" type="datetimeFigureOut">
-              <a:rPr lang="en-GB" smtClean="0"/>
-              <a:t>29/05/2024</a:t>
-            </a:fld>
-            <a:endParaRPr lang="en-GB"/>
-          </a:p>
-        </p:txBody>
-      </p:sp>
-      <p:sp>
-        <p:nvSpPr>
-          <p:cNvPr id="4" name="Slide Image Placeholder 3"/>
-          <p:cNvSpPr>
-            <a:spLocks noGrp="1" noRot="1" noChangeAspect="1"/>
-          </p:cNvSpPr>
-          <p:nvPr>
-            <p:ph type="sldImg" idx="2"/>
-          </p:nvPr>
-        </p:nvSpPr>
-        <p:spPr>
-          <a:xfrm>
-            <a:off x="1371600" y="1143000"/>
-            <a:ext cx="4114800" cy="3086100"/>
-          </a:xfrm>
-          <a:prstGeom prst="rect">
-            <a:avLst/>
-          </a:prstGeom>
-          <a:noFill/>
-          <a:ln w="12700">
-            <a:solidFill>
-              <a:prstClr val="black"/>
-            </a:solidFill>
-          </a:ln>
-        </p:spPr>
-        <p:txBody>
-          <a:bodyPr vert="horz" lIns="91440" tIns="45720" rIns="91440" bIns="45720" rtlCol="0" anchor="ctr"/>
-          <a:lstStyle/>
-          <a:p>
-            <a:endParaRPr lang="en-GB"/>
-          </a:p>
-        </p:txBody>
-      </p:sp>
-      <p:sp>
-        <p:nvSpPr>
-          <p:cNvPr id="5" name="Notes Placeholder 4"/>
-          <p:cNvSpPr>
-            <a:spLocks noGrp="1"/>
-          </p:cNvSpPr>
-          <p:nvPr>
-            <p:ph type="body" sz="quarter" idx="3"/>
-          </p:nvPr>
-        </p:nvSpPr>
-        <p:spPr>
-          <a:xfrm>
-            <a:off x="685800" y="4400550"/>
-            <a:ext cx="5486400" cy="3600450"/>
-          </a:xfrm>
-          <a:prstGeom prst="rect">
-            <a:avLst/>
-          </a:prstGeom>
-        </p:spPr>
-        <p:txBody>
-          <a:bodyPr vert="horz" lIns="91440" tIns="45720" rIns="91440" bIns="45720" rtlCol="0"/>
-          <a:lstStyle/>
-          <a:p>
-            <a:pPr lvl="0"/>
-            <a:r>
-              <a:rPr lang="en-US"/>
-              <a:t>Click to edit Master text styles</a:t>
-            </a:r>
-          </a:p>
-          <a:p>
-            <a:pPr lvl="1"/>
-            <a:r>
-              <a:rPr lang="en-US"/>
-              <a:t>Second level</a:t>
-            </a:r>
-          </a:p>
-          <a:p>
-            <a:pPr lvl="2"/>
-            <a:r>
-              <a:rPr lang="en-US"/>
-              <a:t>Third level</a:t>
-            </a:r>
-          </a:p>
-          <a:p>
-            <a:pPr lvl="3"/>
-            <a:r>
-              <a:rPr lang="en-US"/>
-              <a:t>Fourth level</a:t>
-            </a:r>
-          </a:p>
-          <a:p>
-            <a:pPr lvl="4"/>
-            <a:r>
-              <a:rPr lang="en-US"/>
-              <a:t>Fifth level</a:t>
-            </a:r>
-            <a:endParaRPr lang="en-GB"/>
-          </a:p>
-        </p:txBody>
-      </p:sp>
-      <p:sp>
-        <p:nvSpPr>
-          <p:cNvPr id="6" name="Footer Placeholder 5"/>
-          <p:cNvSpPr>
-            <a:spLocks noGrp="1"/>
-          </p:cNvSpPr>
-          <p:nvPr>
-            <p:ph type="ftr" sz="quarter" idx="4"/>
-          </p:nvPr>
-        </p:nvSpPr>
-        <p:spPr>
-          <a:xfrm>
-            <a:off x="0" y="8685213"/>
-            <a:ext cx="2971800" cy="458787"/>
-          </a:xfrm>
-          <a:prstGeom prst="rect">
-            <a:avLst/>
-          </a:prstGeom>
-        </p:spPr>
-        <p:txBody>
-          <a:bodyPr vert="horz" lIns="91440" tIns="45720" rIns="91440" bIns="45720" rtlCol="0" anchor="b"/>
-          <a:lstStyle>
-            <a:lvl1pPr algn="l">
-              <a:defRPr sz="1200"/>
-            </a:lvl1pPr>
-          </a:lstStyle>
-          <a:p>
-            <a:endParaRPr lang="en-GB"/>
-          </a:p>
-        </p:txBody>
-      </p:sp>
-      <p:sp>
-        <p:nvSpPr>
-          <p:cNvPr id="7" name="Slide Number Placeholder 6"/>
-          <p:cNvSpPr>
-            <a:spLocks noGrp="1"/>
-          </p:cNvSpPr>
-          <p:nvPr>
-            <p:ph type="sldNum" sz="quarter" idx="5"/>
-          </p:nvPr>
-        </p:nvSpPr>
-        <p:spPr>
-          <a:xfrm>
-            <a:off x="3884613" y="8685213"/>
-            <a:ext cx="2971800" cy="458787"/>
-          </a:xfrm>
-          <a:prstGeom prst="rect">
-            <a:avLst/>
-          </a:prstGeom>
-        </p:spPr>
-        <p:txBody>
-          <a:bodyPr vert="horz" lIns="91440" tIns="45720" rIns="91440" bIns="45720" rtlCol="0" anchor="b"/>
-          <a:lstStyle>
-            <a:lvl1pPr algn="r">
-              <a:defRPr sz="1200"/>
-            </a:lvl1pPr>
-          </a:lstStyle>
-          <a:p>
-            <a:fld id="{E79B61DE-1D46-4752-AF65-FA2C4EB0D1D0}" type="slidenum">
-              <a:rPr lang="en-GB" smtClean="0"/>
-              <a:t>‹#›</a:t>
-            </a:fld>
-            <a:endParaRPr lang="en-GB"/>
-          </a:p>
-        </p:txBody>
-      </p:sp>
-    </p:spTree>
-    <p:extLst>
-      <p:ext uri="{BB962C8B-B14F-4D97-AF65-F5344CB8AC3E}">
-        <p14:creationId xmlns:p14="http://schemas.microsoft.com/office/powerpoint/2010/main" val="3957148822"/>
-      </p:ext>
-    </p:extLst>
-  </p:cSld>
-  <p:clrMap bg1="lt1" tx1="dk1" bg2="lt2" tx2="dk2" accent1="accent1" accent2="accent2" accent3="accent3" accent4="accent4" accent5="accent5" accent6="accent6" hlink="hlink" folHlink="folHlink"/>
-  <p:notesStyle>
-    <a:lvl1pPr marL="0" algn="l" defTabSz="914400" rtl="0" eaLnBrk="1" latinLnBrk="0" hangingPunct="1">
-      <a:defRPr sz="1200" kern="1200">
-        <a:solidFill>
-          <a:schemeClr val="tx1"/>
-        </a:solidFill>
-        <a:latin typeface="+mn-lt"/>
-        <a:ea typeface="+mn-ea"/>
-        <a:cs typeface="+mn-cs"/>
-      </a:defRPr>
-    </a:lvl1pPr>
-    <a:lvl2pPr marL="457200" algn="l" defTabSz="914400" rtl="0" eaLnBrk="1" latinLnBrk="0" hangingPunct="1">
-      <a:defRPr sz="1200" kern="1200">
-        <a:solidFill>
-          <a:schemeClr val="tx1"/>
-        </a:solidFill>
-        <a:latin typeface="+mn-lt"/>
-        <a:ea typeface="+mn-ea"/>
-        <a:cs typeface="+mn-cs"/>
-      </a:defRPr>
-    </a:lvl2pPr>
-    <a:lvl3pPr marL="914400" algn="l" defTabSz="914400" rtl="0" eaLnBrk="1" latinLnBrk="0" hangingPunct="1">
-      <a:defRPr sz="1200" kern="1200">
-        <a:solidFill>
-          <a:schemeClr val="tx1"/>
-        </a:solidFill>
-        <a:latin typeface="+mn-lt"/>
-        <a:ea typeface="+mn-ea"/>
-        <a:cs typeface="+mn-cs"/>
-      </a:defRPr>
-    </a:lvl3pPr>
-    <a:lvl4pPr marL="1371600" algn="l" defTabSz="914400" rtl="0" eaLnBrk="1" latinLnBrk="0" hangingPunct="1">
-      <a:defRPr sz="1200" kern="1200">
-        <a:solidFill>
-          <a:schemeClr val="tx1"/>
-        </a:solidFill>
-        <a:latin typeface="+mn-lt"/>
-        <a:ea typeface="+mn-ea"/>
-        <a:cs typeface="+mn-cs"/>
-      </a:defRPr>
-    </a:lvl4pPr>
-    <a:lvl5pPr marL="1828800" algn="l" defTabSz="914400" rtl="0" eaLnBrk="1" latinLnBrk="0" hangingPunct="1">
-      <a:defRPr sz="1200" kern="1200">
-        <a:solidFill>
-          <a:schemeClr val="tx1"/>
-        </a:solidFill>
-        <a:latin typeface="+mn-lt"/>
-        <a:ea typeface="+mn-ea"/>
-        <a:cs typeface="+mn-cs"/>
-      </a:defRPr>
-    </a:lvl5pPr>
-    <a:lvl6pPr marL="2286000" algn="l" defTabSz="914400" rtl="0" eaLnBrk="1" latinLnBrk="0" hangingPunct="1">
-      <a:defRPr sz="1200" kern="1200">
-        <a:solidFill>
-          <a:schemeClr val="tx1"/>
-        </a:solidFill>
-        <a:latin typeface="+mn-lt"/>
-        <a:ea typeface="+mn-ea"/>
-        <a:cs typeface="+mn-cs"/>
-      </a:defRPr>
-    </a:lvl6pPr>
-    <a:lvl7pPr marL="2743200" algn="l" defTabSz="914400" rtl="0" eaLnBrk="1" latinLnBrk="0" hangingPunct="1">
-      <a:defRPr sz="1200" kern="1200">
-        <a:solidFill>
-          <a:schemeClr val="tx1"/>
-        </a:solidFill>
-        <a:latin typeface="+mn-lt"/>
-        <a:ea typeface="+mn-ea"/>
-        <a:cs typeface="+mn-cs"/>
-      </a:defRPr>
-    </a:lvl7pPr>
-    <a:lvl8pPr marL="3200400" algn="l" defTabSz="914400" rtl="0" eaLnBrk="1" latinLnBrk="0" hangingPunct="1">
-      <a:defRPr sz="1200" kern="1200">
-        <a:solidFill>
-          <a:schemeClr val="tx1"/>
-        </a:solidFill>
-        <a:latin typeface="+mn-lt"/>
-        <a:ea typeface="+mn-ea"/>
-        <a:cs typeface="+mn-cs"/>
-      </a:defRPr>
-    </a:lvl8pPr>
-    <a:lvl9pPr marL="3657600" algn="l" defTabSz="914400" rtl="0" eaLnBrk="1" latinLnBrk="0" hangingPunct="1">
-      <a:defRPr sz="1200" kern="1200">
-        <a:solidFill>
-          <a:schemeClr val="tx1"/>
-        </a:solidFill>
-        <a:latin typeface="+mn-lt"/>
-        <a:ea typeface="+mn-ea"/>
-        <a:cs typeface="+mn-cs"/>
-      </a:defRPr>
-    </a:lvl9pPr>
-  </p:notesStyle>
-</p:notesMaster>
-</file>
-
-<file path=ppt/notesSlides/notesSlide1.xml><?xml version="1.0" encoding="utf-8"?>
-<p:notes xmlns:a="http://schemas.openxmlformats.org/drawingml/2006/main" xmlns:r="http://schemas.openxmlformats.org/officeDocument/2006/relationships" xmlns:p="http://schemas.openxmlformats.org/presentationml/2006/main">
-  <p:cSld>
-    <p:spTree>
-      <p:nvGrpSpPr>
-        <p:cNvPr id="1" name=""/>
-        <p:cNvGrpSpPr/>
-        <p:nvPr/>
-      </p:nvGrpSpPr>
-      <p:grpSpPr>
-        <a:xfrm>
-          <a:off x="0" y="0"/>
-          <a:ext cx="0" cy="0"/>
-          <a:chOff x="0" y="0"/>
-          <a:chExt cx="0" cy="0"/>
-        </a:xfrm>
-      </p:grpSpPr>
-      <p:sp>
-        <p:nvSpPr>
-          <p:cNvPr id="2" name="Slide Image Placeholder 1"/>
-          <p:cNvSpPr>
-            <a:spLocks noGrp="1" noRot="1" noChangeAspect="1"/>
-          </p:cNvSpPr>
-          <p:nvPr>
-            <p:ph type="sldImg"/>
-          </p:nvPr>
-        </p:nvSpPr>
-        <p:spPr/>
-      </p:sp>
-      <p:sp>
-        <p:nvSpPr>
-          <p:cNvPr id="3" name="Notes Placeholder 2"/>
-          <p:cNvSpPr>
-            <a:spLocks noGrp="1"/>
-          </p:cNvSpPr>
-          <p:nvPr>
-            <p:ph type="body" idx="1"/>
-          </p:nvPr>
-        </p:nvSpPr>
-        <p:spPr/>
-        <p:txBody>
-          <a:bodyPr/>
-          <a:lstStyle/>
-          <a:p>
-            <a:endParaRPr lang="en-GB" dirty="0"/>
-          </a:p>
-        </p:txBody>
-      </p:sp>
-      <p:sp>
-        <p:nvSpPr>
-          <p:cNvPr id="4" name="Slide Number Placeholder 3"/>
-          <p:cNvSpPr>
-            <a:spLocks noGrp="1"/>
-          </p:cNvSpPr>
-          <p:nvPr>
-            <p:ph type="sldNum" sz="quarter" idx="5"/>
-          </p:nvPr>
-        </p:nvSpPr>
-        <p:spPr/>
-        <p:txBody>
-          <a:bodyPr/>
-          <a:lstStyle/>
-          <a:p>
-            <a:fld id="{E79B61DE-1D46-4752-AF65-FA2C4EB0D1D0}" type="slidenum">
-              <a:rPr lang="en-GB" smtClean="0"/>
-              <a:t>3</a:t>
-            </a:fld>
-            <a:endParaRPr lang="en-GB"/>
-          </a:p>
-        </p:txBody>
-      </p:sp>
-    </p:spTree>
-    <p:extLst>
-      <p:ext uri="{BB962C8B-B14F-4D97-AF65-F5344CB8AC3E}">
-        <p14:creationId xmlns:p14="http://schemas.microsoft.com/office/powerpoint/2010/main" val="3210935938"/>
-      </p:ext>
-    </p:extLst>
-  </p:cSld>
-  <p:clrMapOvr>
-    <a:masterClrMapping/>
-  </p:clrMapOvr>
-</p:notes>
-</file>
-
 <file path=ppt/slideLayouts/slideLayout1.xml><?xml version="1.0" encoding="utf-8"?>
 <p:sldLayout xmlns:a="http://schemas.openxmlformats.org/drawingml/2006/main" xmlns:r="http://schemas.openxmlformats.org/officeDocument/2006/relationships" xmlns:p="http://schemas.openxmlformats.org/presentationml/2006/main" type="title" preserve="1">
   <p:cSld name="Title Slide">
@@ -746,7 +307,7 @@
             <a:fld id="{26EA1CF3-4A15-4CBF-9A5A-6A56C368BE71}" type="datetimeFigureOut">
               <a:rPr lang="en-GB" smtClean="0"/>
               <a:pPr/>
-              <a:t>29/05/2024</a:t>
+              <a:t>29/04/2026</a:t>
             </a:fld>
             <a:endParaRPr lang="en-GB"/>
           </a:p>
@@ -913,7 +474,7 @@
             <a:fld id="{26EA1CF3-4A15-4CBF-9A5A-6A56C368BE71}" type="datetimeFigureOut">
               <a:rPr lang="en-GB" smtClean="0"/>
               <a:pPr/>
-              <a:t>29/05/2024</a:t>
+              <a:t>29/04/2026</a:t>
             </a:fld>
             <a:endParaRPr lang="en-GB"/>
           </a:p>
@@ -1090,7 +651,7 @@
             <a:fld id="{26EA1CF3-4A15-4CBF-9A5A-6A56C368BE71}" type="datetimeFigureOut">
               <a:rPr lang="en-GB" smtClean="0"/>
               <a:pPr/>
-              <a:t>29/05/2024</a:t>
+              <a:t>29/04/2026</a:t>
             </a:fld>
             <a:endParaRPr lang="en-GB"/>
           </a:p>
@@ -1180,10 +741,10 @@
           <a:lstStyle/>
           <a:p>
             <a:r>
-              <a:rPr lang="en-US" dirty="0"/>
+              <a:rPr lang="en-US"/>
               <a:t>Click to edit Master title style</a:t>
             </a:r>
-            <a:endParaRPr lang="en-GB" dirty="0"/>
+            <a:endParaRPr lang="en-GB"/>
           </a:p>
         </p:txBody>
       </p:sp>
@@ -1204,38 +765,38 @@
           <a:p>
             <a:pPr lvl="0"/>
             <a:r>
-              <a:rPr lang="en-US" dirty="0"/>
+              <a:rPr lang="en-US"/>
               <a:t>Click to edit Master text styles</a:t>
             </a:r>
           </a:p>
           <a:p>
             <a:pPr lvl="1"/>
             <a:r>
-              <a:rPr lang="en-US" dirty="0"/>
+              <a:rPr lang="en-US"/>
               <a:t>Second level</a:t>
             </a:r>
           </a:p>
           <a:p>
             <a:pPr lvl="2"/>
             <a:r>
-              <a:rPr lang="en-US" dirty="0"/>
+              <a:rPr lang="en-US"/>
               <a:t>Third level</a:t>
             </a:r>
           </a:p>
           <a:p>
             <a:pPr lvl="3"/>
             <a:r>
-              <a:rPr lang="en-US" dirty="0"/>
+              <a:rPr lang="en-US"/>
               <a:t>Fourth level</a:t>
             </a:r>
           </a:p>
           <a:p>
             <a:pPr lvl="4"/>
             <a:r>
-              <a:rPr lang="en-US" dirty="0"/>
+              <a:rPr lang="en-US"/>
               <a:t>Fifth level</a:t>
             </a:r>
-            <a:endParaRPr lang="en-GB" dirty="0"/>
+            <a:endParaRPr lang="en-GB"/>
           </a:p>
         </p:txBody>
       </p:sp>
@@ -1257,7 +818,7 @@
             <a:fld id="{26EA1CF3-4A15-4CBF-9A5A-6A56C368BE71}" type="datetimeFigureOut">
               <a:rPr lang="en-GB" smtClean="0"/>
               <a:pPr/>
-              <a:t>29/05/2024</a:t>
+              <a:t>29/04/2026</a:t>
             </a:fld>
             <a:endParaRPr lang="en-GB"/>
           </a:p>
@@ -1500,7 +1061,7 @@
             <a:fld id="{26EA1CF3-4A15-4CBF-9A5A-6A56C368BE71}" type="datetimeFigureOut">
               <a:rPr lang="en-GB" smtClean="0"/>
               <a:pPr/>
-              <a:t>29/05/2024</a:t>
+              <a:t>29/04/2026</a:t>
             </a:fld>
             <a:endParaRPr lang="en-GB"/>
           </a:p>
@@ -1785,7 +1346,7 @@
             <a:fld id="{26EA1CF3-4A15-4CBF-9A5A-6A56C368BE71}" type="datetimeFigureOut">
               <a:rPr lang="en-GB" smtClean="0"/>
               <a:pPr/>
-              <a:t>29/05/2024</a:t>
+              <a:t>29/04/2026</a:t>
             </a:fld>
             <a:endParaRPr lang="en-GB"/>
           </a:p>
@@ -2204,7 +1765,7 @@
             <a:fld id="{26EA1CF3-4A15-4CBF-9A5A-6A56C368BE71}" type="datetimeFigureOut">
               <a:rPr lang="en-GB" smtClean="0"/>
               <a:pPr/>
-              <a:t>29/05/2024</a:t>
+              <a:t>29/04/2026</a:t>
             </a:fld>
             <a:endParaRPr lang="en-GB"/>
           </a:p>
@@ -2319,7 +1880,7 @@
             <a:fld id="{26EA1CF3-4A15-4CBF-9A5A-6A56C368BE71}" type="datetimeFigureOut">
               <a:rPr lang="en-GB" smtClean="0"/>
               <a:pPr/>
-              <a:t>29/05/2024</a:t>
+              <a:t>29/04/2026</a:t>
             </a:fld>
             <a:endParaRPr lang="en-GB"/>
           </a:p>
@@ -2411,7 +1972,7 @@
             <a:fld id="{26EA1CF3-4A15-4CBF-9A5A-6A56C368BE71}" type="datetimeFigureOut">
               <a:rPr lang="en-GB" smtClean="0"/>
               <a:pPr/>
-              <a:t>29/05/2024</a:t>
+              <a:t>29/04/2026</a:t>
             </a:fld>
             <a:endParaRPr lang="en-GB"/>
           </a:p>
@@ -2685,7 +2246,7 @@
             <a:fld id="{26EA1CF3-4A15-4CBF-9A5A-6A56C368BE71}" type="datetimeFigureOut">
               <a:rPr lang="en-GB" smtClean="0"/>
               <a:pPr/>
-              <a:t>29/05/2024</a:t>
+              <a:t>29/04/2026</a:t>
             </a:fld>
             <a:endParaRPr lang="en-GB"/>
           </a:p>
@@ -2935,7 +2496,7 @@
             <a:fld id="{26EA1CF3-4A15-4CBF-9A5A-6A56C368BE71}" type="datetimeFigureOut">
               <a:rPr lang="en-GB" smtClean="0"/>
               <a:pPr/>
-              <a:t>29/05/2024</a:t>
+              <a:t>29/04/2026</a:t>
             </a:fld>
             <a:endParaRPr lang="en-GB"/>
           </a:p>
@@ -3029,8 +2590,8 @@
         </p:nvSpPr>
         <p:spPr>
           <a:xfrm>
-            <a:off x="457200" y="836712"/>
-            <a:ext cx="8229600" cy="436909"/>
+            <a:off x="457200" y="274638"/>
+            <a:ext cx="8229600" cy="1143000"/>
           </a:xfrm>
           <a:prstGeom prst="rect">
             <a:avLst/>
@@ -3042,7 +2603,11 @@
           </a:bodyPr>
           <a:lstStyle/>
           <a:p>
-            <a:endParaRPr lang="en-GB" dirty="0"/>
+            <a:r>
+              <a:rPr lang="en-US"/>
+              <a:t>Click to edit Master title style</a:t>
+            </a:r>
+            <a:endParaRPr lang="en-GB"/>
           </a:p>
         </p:txBody>
       </p:sp>
@@ -3073,38 +2638,38 @@
           <a:p>
             <a:pPr lvl="0"/>
             <a:r>
-              <a:rPr lang="en-US" dirty="0"/>
+              <a:rPr lang="en-US"/>
               <a:t>Click to edit Master text styles</a:t>
             </a:r>
           </a:p>
           <a:p>
             <a:pPr lvl="1"/>
             <a:r>
-              <a:rPr lang="en-US" dirty="0"/>
+              <a:rPr lang="en-US"/>
               <a:t>Second level</a:t>
             </a:r>
           </a:p>
           <a:p>
             <a:pPr lvl="2"/>
             <a:r>
-              <a:rPr lang="en-US" dirty="0"/>
+              <a:rPr lang="en-US"/>
               <a:t>Third level</a:t>
             </a:r>
           </a:p>
           <a:p>
             <a:pPr lvl="3"/>
             <a:r>
-              <a:rPr lang="en-US" dirty="0"/>
+              <a:rPr lang="en-US"/>
               <a:t>Fourth level</a:t>
             </a:r>
           </a:p>
           <a:p>
             <a:pPr lvl="4"/>
             <a:r>
-              <a:rPr lang="en-US" dirty="0"/>
+              <a:rPr lang="en-US"/>
               <a:t>Fifth level</a:t>
             </a:r>
-            <a:endParaRPr lang="en-GB" dirty="0"/>
+            <a:endParaRPr lang="en-GB"/>
           </a:p>
         </p:txBody>
       </p:sp>
@@ -3144,7 +2709,7 @@
             <a:fld id="{26EA1CF3-4A15-4CBF-9A5A-6A56C368BE71}" type="datetimeFigureOut">
               <a:rPr lang="en-GB" smtClean="0"/>
               <a:pPr/>
-              <a:t>29/05/2024</a:t>
+              <a:t>29/04/2026</a:t>
             </a:fld>
             <a:endParaRPr lang="en-GB"/>
           </a:p>
@@ -3229,147 +2794,6 @@
           </a:p>
         </p:txBody>
       </p:sp>
-      <p:sp>
-        <p:nvSpPr>
-          <p:cNvPr id="7" name="Rectangle 6">
-            <a:extLst>
-              <a:ext uri="{FF2B5EF4-FFF2-40B4-BE49-F238E27FC236}">
-                <a16:creationId xmlns:a16="http://schemas.microsoft.com/office/drawing/2014/main" id="{A81FA438-06AA-FBAF-6598-C474F739A20A}"/>
-              </a:ext>
-            </a:extLst>
-          </p:cNvPr>
-          <p:cNvSpPr/>
-          <p:nvPr userDrawn="1"/>
-        </p:nvSpPr>
-        <p:spPr>
-          <a:xfrm>
-            <a:off x="72008" y="5949280"/>
-            <a:ext cx="899592" cy="773808"/>
-          </a:xfrm>
-          <a:prstGeom prst="rect">
-            <a:avLst/>
-          </a:prstGeom>
-          <a:blipFill>
-            <a:blip r:embed="rId13"/>
-            <a:stretch>
-              <a:fillRect/>
-            </a:stretch>
-          </a:blipFill>
-          <a:ln>
-            <a:noFill/>
-          </a:ln>
-        </p:spPr>
-        <p:style>
-          <a:lnRef idx="2">
-            <a:schemeClr val="accent1">
-              <a:shade val="15000"/>
-            </a:schemeClr>
-          </a:lnRef>
-          <a:fillRef idx="1">
-            <a:schemeClr val="accent1"/>
-          </a:fillRef>
-          <a:effectRef idx="0">
-            <a:schemeClr val="accent1"/>
-          </a:effectRef>
-          <a:fontRef idx="minor">
-            <a:schemeClr val="lt1"/>
-          </a:fontRef>
-        </p:style>
-        <p:txBody>
-          <a:bodyPr rtlCol="0" anchor="ctr"/>
-          <a:lstStyle/>
-          <a:p>
-            <a:pPr algn="ctr"/>
-            <a:endParaRPr lang="en-GB"/>
-          </a:p>
-        </p:txBody>
-      </p:sp>
-      <p:cxnSp>
-        <p:nvCxnSpPr>
-          <p:cNvPr id="9" name="Straight Connector 8">
-            <a:extLst>
-              <a:ext uri="{FF2B5EF4-FFF2-40B4-BE49-F238E27FC236}">
-                <a16:creationId xmlns:a16="http://schemas.microsoft.com/office/drawing/2014/main" id="{75A119C8-FA69-A36C-A18F-B470565B9C0C}"/>
-              </a:ext>
-            </a:extLst>
-          </p:cNvPr>
-          <p:cNvCxnSpPr>
-            <a:cxnSpLocks/>
-          </p:cNvCxnSpPr>
-          <p:nvPr userDrawn="1"/>
-        </p:nvCxnSpPr>
-        <p:spPr>
-          <a:xfrm>
-            <a:off x="971600" y="6237312"/>
-            <a:ext cx="7715200" cy="0"/>
-          </a:xfrm>
-          <a:prstGeom prst="line">
-            <a:avLst/>
-          </a:prstGeom>
-          <a:ln w="19050">
-            <a:solidFill>
-              <a:srgbClr val="FF9900"/>
-            </a:solidFill>
-          </a:ln>
-        </p:spPr>
-        <p:style>
-          <a:lnRef idx="1">
-            <a:schemeClr val="accent1"/>
-          </a:lnRef>
-          <a:fillRef idx="0">
-            <a:schemeClr val="accent1"/>
-          </a:fillRef>
-          <a:effectRef idx="0">
-            <a:schemeClr val="accent1"/>
-          </a:effectRef>
-          <a:fontRef idx="minor">
-            <a:schemeClr val="tx1"/>
-          </a:fontRef>
-        </p:style>
-      </p:cxnSp>
-      <p:cxnSp>
-        <p:nvCxnSpPr>
-          <p:cNvPr id="14" name="Straight Connector 13">
-            <a:extLst>
-              <a:ext uri="{FF2B5EF4-FFF2-40B4-BE49-F238E27FC236}">
-                <a16:creationId xmlns:a16="http://schemas.microsoft.com/office/drawing/2014/main" id="{4AFB4C0C-9840-84EC-CAB9-6BA55788BC6D}"/>
-              </a:ext>
-            </a:extLst>
-          </p:cNvPr>
-          <p:cNvCxnSpPr>
-            <a:cxnSpLocks/>
-          </p:cNvCxnSpPr>
-          <p:nvPr userDrawn="1"/>
-        </p:nvCxnSpPr>
-        <p:spPr>
-          <a:xfrm>
-            <a:off x="457200" y="764704"/>
-            <a:ext cx="8229600" cy="0"/>
-          </a:xfrm>
-          <a:prstGeom prst="line">
-            <a:avLst/>
-          </a:prstGeom>
-          <a:ln w="19050">
-            <a:solidFill>
-              <a:srgbClr val="FF9900"/>
-            </a:solidFill>
-          </a:ln>
-        </p:spPr>
-        <p:style>
-          <a:lnRef idx="1">
-            <a:schemeClr val="accent1"/>
-          </a:lnRef>
-          <a:fillRef idx="0">
-            <a:schemeClr val="accent1"/>
-          </a:fillRef>
-          <a:effectRef idx="0">
-            <a:schemeClr val="accent1"/>
-          </a:effectRef>
-          <a:fontRef idx="minor">
-            <a:schemeClr val="tx1"/>
-          </a:fontRef>
-        </p:style>
-      </p:cxnSp>
     </p:spTree>
   </p:cSld>
   <p:clrMap bg1="lt1" tx1="dk1" bg2="lt2" tx2="dk2" accent1="accent1" accent2="accent2" accent3="accent3" accent4="accent4" accent5="accent5" accent6="accent6" hlink="hlink" folHlink="folHlink"/>
@@ -3697,33 +3121,47 @@
             </a:r>
           </a:p>
           <a:p>
-            <a:r>
+            <a:br>
               <a:rPr lang="en-GB" sz="1200" dirty="0">
                 <a:solidFill>
                   <a:schemeClr val="bg1"/>
                 </a:solidFill>
               </a:rPr>
-              <a:t>CCLI Song # 4219071</a:t>
-            </a:r>
-          </a:p>
-          <a:p>
-            <a:r>
+            </a:br>
+            <a:br>
               <a:rPr lang="en-GB" sz="1200" dirty="0">
                 <a:solidFill>
                   <a:schemeClr val="bg1"/>
                 </a:solidFill>
               </a:rPr>
-              <a:t>Martin Smith | Stuart Garrard</a:t>
-            </a:r>
-          </a:p>
-          <a:p>
+            </a:br>
             <a:r>
               <a:rPr lang="en-GB" sz="1200" dirty="0">
                 <a:solidFill>
                   <a:schemeClr val="bg1"/>
                 </a:solidFill>
               </a:rPr>
-              <a:t>© 2003, 2004 Curious? Music UK</a:t>
+              <a:t>CCLI Song # 1527</a:t>
+            </a:r>
+          </a:p>
+          <a:p>
+            <a:r>
+              <a:rPr lang="en-GB" sz="1200" dirty="0">
+                <a:solidFill>
+                  <a:schemeClr val="bg1"/>
+                </a:solidFill>
+              </a:rPr>
+              <a:t>Jack Hayford</a:t>
+            </a:r>
+          </a:p>
+          <a:p>
+            <a:r>
+              <a:rPr lang="en-GB" sz="1200" dirty="0">
+                <a:solidFill>
+                  <a:schemeClr val="bg1"/>
+                </a:solidFill>
+              </a:rPr>
+              <a:t>© 1984 New Spring</a:t>
             </a:r>
           </a:p>
           <a:p>
@@ -3767,7 +3205,7 @@
     </p:spTree>
     <p:extLst>
       <p:ext uri="{BB962C8B-B14F-4D97-AF65-F5344CB8AC3E}">
-        <p14:creationId xmlns:p14="http://schemas.microsoft.com/office/powerpoint/2010/main" val="2109459729"/>
+        <p14:creationId xmlns:p14="http://schemas.microsoft.com/office/powerpoint/2010/main" val="2940382954"/>
       </p:ext>
     </p:extLst>
   </p:cSld>
@@ -3782,13 +3220,7 @@
   <p:cSld>
     <p:spTree>
       <p:nvGrpSpPr>
-        <p:cNvPr id="1" name="">
-          <a:extLst>
-            <a:ext uri="{FF2B5EF4-FFF2-40B4-BE49-F238E27FC236}">
-              <a16:creationId xmlns:a16="http://schemas.microsoft.com/office/drawing/2014/main" id="{3D1E7B9C-F9A1-7659-93D2-3F64E265F70C}"/>
-            </a:ext>
-          </a:extLst>
-        </p:cNvPr>
+        <p:cNvPr id="1" name=""/>
         <p:cNvGrpSpPr/>
         <p:nvPr/>
       </p:nvGrpSpPr>
@@ -3802,19 +3234,96 @@
       </p:grpSpPr>
       <p:sp>
         <p:nvSpPr>
-          <p:cNvPr id="2" name="TextBox 1">
-            <a:extLst>
-              <a:ext uri="{FF2B5EF4-FFF2-40B4-BE49-F238E27FC236}">
-                <a16:creationId xmlns:a16="http://schemas.microsoft.com/office/drawing/2014/main" id="{01D2047C-B9B6-B5E7-3C3E-A87CC472E819}"/>
-              </a:ext>
-            </a:extLst>
-          </p:cNvPr>
+          <p:cNvPr id="3" name="Subtitle 2"/>
+          <p:cNvSpPr>
+            <a:spLocks noGrp="1"/>
+          </p:cNvSpPr>
+          <p:nvPr>
+            <p:ph type="subTitle" idx="1"/>
+          </p:nvPr>
+        </p:nvSpPr>
+        <p:spPr>
+          <a:xfrm>
+            <a:off x="251520" y="836712"/>
+            <a:ext cx="8640960" cy="6480720"/>
+          </a:xfrm>
+        </p:spPr>
+        <p:txBody>
+          <a:bodyPr>
+            <a:noAutofit/>
+          </a:bodyPr>
+          <a:lstStyle/>
+          <a:p>
+            <a:r>
+              <a:rPr lang="en-GB" sz="3600" dirty="0">
+                <a:solidFill>
+                  <a:schemeClr val="bg1"/>
+                </a:solidFill>
+              </a:rPr>
+              <a:t>Majesty worship His majesty</a:t>
+            </a:r>
+          </a:p>
+          <a:p>
+            <a:r>
+              <a:rPr lang="en-GB" sz="3600" dirty="0">
+                <a:solidFill>
+                  <a:schemeClr val="bg1"/>
+                </a:solidFill>
+              </a:rPr>
+              <a:t>Unto Jesus be all glory</a:t>
+            </a:r>
+          </a:p>
+          <a:p>
+            <a:r>
+              <a:rPr lang="en-GB" sz="3600" dirty="0">
+                <a:solidFill>
+                  <a:schemeClr val="bg1"/>
+                </a:solidFill>
+              </a:rPr>
+              <a:t>Honor and praise</a:t>
+            </a:r>
+          </a:p>
+          <a:p>
+            <a:r>
+              <a:rPr lang="en-GB" sz="3600" dirty="0">
+                <a:solidFill>
+                  <a:schemeClr val="bg1"/>
+                </a:solidFill>
+              </a:rPr>
+              <a:t>Majesty kingdom authority</a:t>
+            </a:r>
+          </a:p>
+          <a:p>
+            <a:r>
+              <a:rPr lang="en-GB" sz="3600" dirty="0">
+                <a:solidFill>
+                  <a:schemeClr val="bg1"/>
+                </a:solidFill>
+              </a:rPr>
+              <a:t>Flow from His throne</a:t>
+            </a:r>
+          </a:p>
+          <a:p>
+            <a:r>
+              <a:rPr lang="en-GB" sz="3600" dirty="0">
+                <a:solidFill>
+                  <a:schemeClr val="bg1"/>
+                </a:solidFill>
+              </a:rPr>
+              <a:t>Unto His own His anthem raise</a:t>
+            </a:r>
+          </a:p>
+        </p:txBody>
+      </p:sp>
+      <p:sp>
+        <p:nvSpPr>
+          <p:cNvPr id="4" name="TextBox 3"/>
           <p:cNvSpPr txBox="1"/>
           <p:nvPr/>
         </p:nvSpPr>
         <p:spPr>
           <a:xfrm>
-            <a:off x="8316416" y="0"/>
+            <a:off x="8529729" y="0"/>
             <a:ext cx="628698" cy="461665"/>
           </a:xfrm>
           <a:prstGeom prst="rect">
@@ -3834,281 +3343,7 @@
                   <a:schemeClr val="bg1"/>
                 </a:solidFill>
               </a:rPr>
-              <a:t>1/4</a:t>
-            </a:r>
-          </a:p>
-        </p:txBody>
-      </p:sp>
-      <p:sp>
-        <p:nvSpPr>
-          <p:cNvPr id="3" name="Subtitle 2">
-            <a:extLst>
-              <a:ext uri="{FF2B5EF4-FFF2-40B4-BE49-F238E27FC236}">
-                <a16:creationId xmlns:a16="http://schemas.microsoft.com/office/drawing/2014/main" id="{910E4131-5B5F-4093-3569-C0A497326507}"/>
-              </a:ext>
-            </a:extLst>
-          </p:cNvPr>
-          <p:cNvSpPr txBox="1">
-            <a:spLocks/>
-          </p:cNvSpPr>
-          <p:nvPr/>
-        </p:nvSpPr>
-        <p:spPr>
-          <a:xfrm>
-            <a:off x="251520" y="620688"/>
-            <a:ext cx="8640960" cy="6480720"/>
-          </a:xfrm>
-          <a:prstGeom prst="rect">
-            <a:avLst/>
-          </a:prstGeom>
-        </p:spPr>
-        <p:txBody>
-          <a:bodyPr vert="horz" lIns="91440" tIns="45720" rIns="91440" bIns="45720" rtlCol="0">
-            <a:noAutofit/>
-          </a:bodyPr>
-          <a:lstStyle>
-            <a:lvl1pPr marL="0" indent="0" algn="ctr" defTabSz="914400" rtl="0" eaLnBrk="1" latinLnBrk="0" hangingPunct="1">
-              <a:spcBef>
-                <a:spcPct val="20000"/>
-              </a:spcBef>
-              <a:buFont typeface="Arial" pitchFamily="34" charset="0"/>
-              <a:buNone/>
-              <a:defRPr sz="3200" kern="1200">
-                <a:solidFill>
-                  <a:schemeClr val="tx1">
-                    <a:tint val="75000"/>
-                  </a:schemeClr>
-                </a:solidFill>
-                <a:latin typeface="+mn-lt"/>
-                <a:ea typeface="+mn-ea"/>
-                <a:cs typeface="+mn-cs"/>
-              </a:defRPr>
-            </a:lvl1pPr>
-            <a:lvl2pPr marL="457200" indent="0" algn="ctr" defTabSz="914400" rtl="0" eaLnBrk="1" latinLnBrk="0" hangingPunct="1">
-              <a:spcBef>
-                <a:spcPct val="20000"/>
-              </a:spcBef>
-              <a:buFont typeface="Arial" pitchFamily="34" charset="0"/>
-              <a:buNone/>
-              <a:defRPr sz="2800" kern="1200">
-                <a:solidFill>
-                  <a:schemeClr val="tx1">
-                    <a:tint val="75000"/>
-                  </a:schemeClr>
-                </a:solidFill>
-                <a:latin typeface="+mn-lt"/>
-                <a:ea typeface="+mn-ea"/>
-                <a:cs typeface="+mn-cs"/>
-              </a:defRPr>
-            </a:lvl2pPr>
-            <a:lvl3pPr marL="914400" indent="0" algn="ctr" defTabSz="914400" rtl="0" eaLnBrk="1" latinLnBrk="0" hangingPunct="1">
-              <a:spcBef>
-                <a:spcPct val="20000"/>
-              </a:spcBef>
-              <a:buFont typeface="Arial" pitchFamily="34" charset="0"/>
-              <a:buNone/>
-              <a:defRPr sz="2400" kern="1200">
-                <a:solidFill>
-                  <a:schemeClr val="tx1">
-                    <a:tint val="75000"/>
-                  </a:schemeClr>
-                </a:solidFill>
-                <a:latin typeface="+mn-lt"/>
-                <a:ea typeface="+mn-ea"/>
-                <a:cs typeface="+mn-cs"/>
-              </a:defRPr>
-            </a:lvl3pPr>
-            <a:lvl4pPr marL="1371600" indent="0" algn="ctr" defTabSz="914400" rtl="0" eaLnBrk="1" latinLnBrk="0" hangingPunct="1">
-              <a:spcBef>
-                <a:spcPct val="20000"/>
-              </a:spcBef>
-              <a:buFont typeface="Arial" pitchFamily="34" charset="0"/>
-              <a:buNone/>
-              <a:defRPr sz="2000" kern="1200">
-                <a:solidFill>
-                  <a:schemeClr val="tx1">
-                    <a:tint val="75000"/>
-                  </a:schemeClr>
-                </a:solidFill>
-                <a:latin typeface="+mn-lt"/>
-                <a:ea typeface="+mn-ea"/>
-                <a:cs typeface="+mn-cs"/>
-              </a:defRPr>
-            </a:lvl4pPr>
-            <a:lvl5pPr marL="1828800" indent="0" algn="ctr" defTabSz="914400" rtl="0" eaLnBrk="1" latinLnBrk="0" hangingPunct="1">
-              <a:spcBef>
-                <a:spcPct val="20000"/>
-              </a:spcBef>
-              <a:buFont typeface="Arial" pitchFamily="34" charset="0"/>
-              <a:buNone/>
-              <a:defRPr sz="2000" kern="1200">
-                <a:solidFill>
-                  <a:schemeClr val="tx1">
-                    <a:tint val="75000"/>
-                  </a:schemeClr>
-                </a:solidFill>
-                <a:latin typeface="+mn-lt"/>
-                <a:ea typeface="+mn-ea"/>
-                <a:cs typeface="+mn-cs"/>
-              </a:defRPr>
-            </a:lvl5pPr>
-            <a:lvl6pPr marL="2286000" indent="0" algn="ctr" defTabSz="914400" rtl="0" eaLnBrk="1" latinLnBrk="0" hangingPunct="1">
-              <a:spcBef>
-                <a:spcPct val="20000"/>
-              </a:spcBef>
-              <a:buFont typeface="Arial" pitchFamily="34" charset="0"/>
-              <a:buNone/>
-              <a:defRPr sz="2000" kern="1200">
-                <a:solidFill>
-                  <a:schemeClr val="tx1">
-                    <a:tint val="75000"/>
-                  </a:schemeClr>
-                </a:solidFill>
-                <a:latin typeface="+mn-lt"/>
-                <a:ea typeface="+mn-ea"/>
-                <a:cs typeface="+mn-cs"/>
-              </a:defRPr>
-            </a:lvl6pPr>
-            <a:lvl7pPr marL="2743200" indent="0" algn="ctr" defTabSz="914400" rtl="0" eaLnBrk="1" latinLnBrk="0" hangingPunct="1">
-              <a:spcBef>
-                <a:spcPct val="20000"/>
-              </a:spcBef>
-              <a:buFont typeface="Arial" pitchFamily="34" charset="0"/>
-              <a:buNone/>
-              <a:defRPr sz="2000" kern="1200">
-                <a:solidFill>
-                  <a:schemeClr val="tx1">
-                    <a:tint val="75000"/>
-                  </a:schemeClr>
-                </a:solidFill>
-                <a:latin typeface="+mn-lt"/>
-                <a:ea typeface="+mn-ea"/>
-                <a:cs typeface="+mn-cs"/>
-              </a:defRPr>
-            </a:lvl7pPr>
-            <a:lvl8pPr marL="3200400" indent="0" algn="ctr" defTabSz="914400" rtl="0" eaLnBrk="1" latinLnBrk="0" hangingPunct="1">
-              <a:spcBef>
-                <a:spcPct val="20000"/>
-              </a:spcBef>
-              <a:buFont typeface="Arial" pitchFamily="34" charset="0"/>
-              <a:buNone/>
-              <a:defRPr sz="2000" kern="1200">
-                <a:solidFill>
-                  <a:schemeClr val="tx1">
-                    <a:tint val="75000"/>
-                  </a:schemeClr>
-                </a:solidFill>
-                <a:latin typeface="+mn-lt"/>
-                <a:ea typeface="+mn-ea"/>
-                <a:cs typeface="+mn-cs"/>
-              </a:defRPr>
-            </a:lvl8pPr>
-            <a:lvl9pPr marL="3657600" indent="0" algn="ctr" defTabSz="914400" rtl="0" eaLnBrk="1" latinLnBrk="0" hangingPunct="1">
-              <a:spcBef>
-                <a:spcPct val="20000"/>
-              </a:spcBef>
-              <a:buFont typeface="Arial" pitchFamily="34" charset="0"/>
-              <a:buNone/>
-              <a:defRPr sz="2000" kern="1200">
-                <a:solidFill>
-                  <a:schemeClr val="tx1">
-                    <a:tint val="75000"/>
-                  </a:schemeClr>
-                </a:solidFill>
-                <a:latin typeface="+mn-lt"/>
-                <a:ea typeface="+mn-ea"/>
-                <a:cs typeface="+mn-cs"/>
-              </a:defRPr>
-            </a:lvl9pPr>
-          </a:lstStyle>
-          <a:p>
-            <a:pPr>
-              <a:spcBef>
-                <a:spcPts val="600"/>
-              </a:spcBef>
-            </a:pPr>
-            <a:r>
-              <a:rPr lang="en-GB" sz="4000" dirty="0">
-                <a:solidFill>
-                  <a:schemeClr val="bg1"/>
-                </a:solidFill>
-              </a:rPr>
-              <a:t>Here I am</a:t>
-            </a:r>
-          </a:p>
-          <a:p>
-            <a:pPr>
-              <a:spcBef>
-                <a:spcPts val="600"/>
-              </a:spcBef>
-            </a:pPr>
-            <a:r>
-              <a:rPr lang="en-GB" sz="4000" dirty="0">
-                <a:solidFill>
-                  <a:schemeClr val="bg1"/>
-                </a:solidFill>
-              </a:rPr>
-              <a:t>Humbled by Your majesty</a:t>
-            </a:r>
-          </a:p>
-          <a:p>
-            <a:pPr>
-              <a:spcBef>
-                <a:spcPts val="600"/>
-              </a:spcBef>
-            </a:pPr>
-            <a:r>
-              <a:rPr lang="en-GB" sz="4000" dirty="0">
-                <a:solidFill>
-                  <a:schemeClr val="bg1"/>
-                </a:solidFill>
-              </a:rPr>
-              <a:t>Covered by Your grace so free</a:t>
-            </a:r>
-          </a:p>
-          <a:p>
-            <a:pPr>
-              <a:spcBef>
-                <a:spcPts val="600"/>
-              </a:spcBef>
-            </a:pPr>
-            <a:r>
-              <a:rPr lang="en-GB" sz="4000" dirty="0">
-                <a:solidFill>
-                  <a:schemeClr val="bg1"/>
-                </a:solidFill>
-              </a:rPr>
-              <a:t>Here I am</a:t>
-            </a:r>
-          </a:p>
-          <a:p>
-            <a:pPr>
-              <a:spcBef>
-                <a:spcPts val="600"/>
-              </a:spcBef>
-            </a:pPr>
-            <a:r>
-              <a:rPr lang="en-GB" sz="4000" dirty="0">
-                <a:solidFill>
-                  <a:schemeClr val="bg1"/>
-                </a:solidFill>
-              </a:rPr>
-              <a:t>Knowing I'm a sinful man</a:t>
-            </a:r>
-          </a:p>
-          <a:p>
-            <a:pPr>
-              <a:spcBef>
-                <a:spcPts val="600"/>
-              </a:spcBef>
-            </a:pPr>
-            <a:r>
-              <a:rPr lang="en-GB" sz="4000" dirty="0">
-                <a:solidFill>
-                  <a:schemeClr val="bg1"/>
-                </a:solidFill>
-              </a:rPr>
-              <a:t>Covered by the blood of the Lamb</a:t>
+              <a:t>1/2</a:t>
             </a:r>
           </a:p>
         </p:txBody>
@@ -4116,7 +3351,7 @@
     </p:spTree>
     <p:extLst>
       <p:ext uri="{BB962C8B-B14F-4D97-AF65-F5344CB8AC3E}">
-        <p14:creationId xmlns:p14="http://schemas.microsoft.com/office/powerpoint/2010/main" val="255242626"/>
+        <p14:creationId xmlns:p14="http://schemas.microsoft.com/office/powerpoint/2010/main" val="2175635830"/>
       </p:ext>
     </p:extLst>
   </p:cSld>
@@ -4131,13 +3366,7 @@
   <p:cSld>
     <p:spTree>
       <p:nvGrpSpPr>
-        <p:cNvPr id="1" name="">
-          <a:extLst>
-            <a:ext uri="{FF2B5EF4-FFF2-40B4-BE49-F238E27FC236}">
-              <a16:creationId xmlns:a16="http://schemas.microsoft.com/office/drawing/2014/main" id="{3D1E7B9C-F9A1-7659-93D2-3F64E265F70C}"/>
-            </a:ext>
-          </a:extLst>
-        </p:cNvPr>
+        <p:cNvPr id="1" name=""/>
         <p:cNvGrpSpPr/>
         <p:nvPr/>
       </p:nvGrpSpPr>
@@ -4151,19 +3380,106 @@
       </p:grpSpPr>
       <p:sp>
         <p:nvSpPr>
-          <p:cNvPr id="2" name="TextBox 1">
-            <a:extLst>
-              <a:ext uri="{FF2B5EF4-FFF2-40B4-BE49-F238E27FC236}">
-                <a16:creationId xmlns:a16="http://schemas.microsoft.com/office/drawing/2014/main" id="{01D2047C-B9B6-B5E7-3C3E-A87CC472E819}"/>
-              </a:ext>
-            </a:extLst>
-          </p:cNvPr>
+          <p:cNvPr id="3" name="Subtitle 2"/>
+          <p:cNvSpPr>
+            <a:spLocks noGrp="1"/>
+          </p:cNvSpPr>
+          <p:nvPr>
+            <p:ph type="subTitle" idx="1"/>
+          </p:nvPr>
+        </p:nvSpPr>
+        <p:spPr>
+          <a:xfrm>
+            <a:off x="251520" y="764704"/>
+            <a:ext cx="8640960" cy="6480720"/>
+          </a:xfrm>
+        </p:spPr>
+        <p:txBody>
+          <a:bodyPr>
+            <a:noAutofit/>
+          </a:bodyPr>
+          <a:lstStyle/>
+          <a:p>
+            <a:r>
+              <a:rPr lang="en-GB" sz="3600" dirty="0">
+                <a:solidFill>
+                  <a:schemeClr val="bg1"/>
+                </a:solidFill>
+              </a:rPr>
+              <a:t>So exalt lift up on high</a:t>
+            </a:r>
+          </a:p>
+          <a:p>
+            <a:r>
+              <a:rPr lang="en-GB" sz="3600" dirty="0">
+                <a:solidFill>
+                  <a:schemeClr val="bg1"/>
+                </a:solidFill>
+              </a:rPr>
+              <a:t>The name of Jesus</a:t>
+            </a:r>
+          </a:p>
+          <a:p>
+            <a:r>
+              <a:rPr lang="en-GB" sz="3600" dirty="0">
+                <a:solidFill>
+                  <a:schemeClr val="bg1"/>
+                </a:solidFill>
+              </a:rPr>
+              <a:t>Magnify come glorify</a:t>
+            </a:r>
+          </a:p>
+          <a:p>
+            <a:r>
+              <a:rPr lang="en-GB" sz="3600" dirty="0">
+                <a:solidFill>
+                  <a:schemeClr val="bg1"/>
+                </a:solidFill>
+              </a:rPr>
+              <a:t>Christ Jesus the King</a:t>
+            </a:r>
+          </a:p>
+          <a:p>
+            <a:r>
+              <a:rPr lang="en-GB" sz="3600" dirty="0">
+                <a:solidFill>
+                  <a:schemeClr val="bg1"/>
+                </a:solidFill>
+              </a:rPr>
+              <a:t>Majesty worship His majesty</a:t>
+            </a:r>
+          </a:p>
+          <a:p>
+            <a:r>
+              <a:rPr lang="en-GB" sz="3600" dirty="0">
+                <a:solidFill>
+                  <a:schemeClr val="bg1"/>
+                </a:solidFill>
+              </a:rPr>
+              <a:t>Jesus who died now glorified</a:t>
+            </a:r>
+          </a:p>
+          <a:p>
+            <a:r>
+              <a:rPr lang="en-GB" sz="3600" dirty="0">
+                <a:solidFill>
+                  <a:schemeClr val="bg1"/>
+                </a:solidFill>
+              </a:rPr>
+              <a:t>King of all kings</a:t>
+            </a:r>
+          </a:p>
+        </p:txBody>
+      </p:sp>
+      <p:sp>
+        <p:nvSpPr>
+          <p:cNvPr id="4" name="TextBox 3"/>
           <p:cNvSpPr txBox="1"/>
           <p:nvPr/>
         </p:nvSpPr>
         <p:spPr>
           <a:xfrm>
-            <a:off x="8316416" y="0"/>
+            <a:off x="8529729" y="0"/>
             <a:ext cx="628698" cy="461665"/>
           </a:xfrm>
           <a:prstGeom prst="rect">
@@ -4183,236 +3499,7 @@
                   <a:schemeClr val="bg1"/>
                 </a:solidFill>
               </a:rPr>
-              <a:t>2/4</a:t>
-            </a:r>
-          </a:p>
-        </p:txBody>
-      </p:sp>
-      <p:sp>
-        <p:nvSpPr>
-          <p:cNvPr id="3" name="Subtitle 2">
-            <a:extLst>
-              <a:ext uri="{FF2B5EF4-FFF2-40B4-BE49-F238E27FC236}">
-                <a16:creationId xmlns:a16="http://schemas.microsoft.com/office/drawing/2014/main" id="{910E4131-5B5F-4093-3569-C0A497326507}"/>
-              </a:ext>
-            </a:extLst>
-          </p:cNvPr>
-          <p:cNvSpPr txBox="1">
-            <a:spLocks/>
-          </p:cNvSpPr>
-          <p:nvPr/>
-        </p:nvSpPr>
-        <p:spPr>
-          <a:xfrm>
-            <a:off x="251520" y="620688"/>
-            <a:ext cx="8640960" cy="6480720"/>
-          </a:xfrm>
-          <a:prstGeom prst="rect">
-            <a:avLst/>
-          </a:prstGeom>
-        </p:spPr>
-        <p:txBody>
-          <a:bodyPr vert="horz" lIns="91440" tIns="45720" rIns="91440" bIns="45720" rtlCol="0">
-            <a:noAutofit/>
-          </a:bodyPr>
-          <a:lstStyle>
-            <a:lvl1pPr marL="0" indent="0" algn="ctr" defTabSz="914400" rtl="0" eaLnBrk="1" latinLnBrk="0" hangingPunct="1">
-              <a:spcBef>
-                <a:spcPct val="20000"/>
-              </a:spcBef>
-              <a:buFont typeface="Arial" pitchFamily="34" charset="0"/>
-              <a:buNone/>
-              <a:defRPr sz="3200" kern="1200">
-                <a:solidFill>
-                  <a:schemeClr val="tx1">
-                    <a:tint val="75000"/>
-                  </a:schemeClr>
-                </a:solidFill>
-                <a:latin typeface="+mn-lt"/>
-                <a:ea typeface="+mn-ea"/>
-                <a:cs typeface="+mn-cs"/>
-              </a:defRPr>
-            </a:lvl1pPr>
-            <a:lvl2pPr marL="457200" indent="0" algn="ctr" defTabSz="914400" rtl="0" eaLnBrk="1" latinLnBrk="0" hangingPunct="1">
-              <a:spcBef>
-                <a:spcPct val="20000"/>
-              </a:spcBef>
-              <a:buFont typeface="Arial" pitchFamily="34" charset="0"/>
-              <a:buNone/>
-              <a:defRPr sz="2800" kern="1200">
-                <a:solidFill>
-                  <a:schemeClr val="tx1">
-                    <a:tint val="75000"/>
-                  </a:schemeClr>
-                </a:solidFill>
-                <a:latin typeface="+mn-lt"/>
-                <a:ea typeface="+mn-ea"/>
-                <a:cs typeface="+mn-cs"/>
-              </a:defRPr>
-            </a:lvl2pPr>
-            <a:lvl3pPr marL="914400" indent="0" algn="ctr" defTabSz="914400" rtl="0" eaLnBrk="1" latinLnBrk="0" hangingPunct="1">
-              <a:spcBef>
-                <a:spcPct val="20000"/>
-              </a:spcBef>
-              <a:buFont typeface="Arial" pitchFamily="34" charset="0"/>
-              <a:buNone/>
-              <a:defRPr sz="2400" kern="1200">
-                <a:solidFill>
-                  <a:schemeClr val="tx1">
-                    <a:tint val="75000"/>
-                  </a:schemeClr>
-                </a:solidFill>
-                <a:latin typeface="+mn-lt"/>
-                <a:ea typeface="+mn-ea"/>
-                <a:cs typeface="+mn-cs"/>
-              </a:defRPr>
-            </a:lvl3pPr>
-            <a:lvl4pPr marL="1371600" indent="0" algn="ctr" defTabSz="914400" rtl="0" eaLnBrk="1" latinLnBrk="0" hangingPunct="1">
-              <a:spcBef>
-                <a:spcPct val="20000"/>
-              </a:spcBef>
-              <a:buFont typeface="Arial" pitchFamily="34" charset="0"/>
-              <a:buNone/>
-              <a:defRPr sz="2000" kern="1200">
-                <a:solidFill>
-                  <a:schemeClr val="tx1">
-                    <a:tint val="75000"/>
-                  </a:schemeClr>
-                </a:solidFill>
-                <a:latin typeface="+mn-lt"/>
-                <a:ea typeface="+mn-ea"/>
-                <a:cs typeface="+mn-cs"/>
-              </a:defRPr>
-            </a:lvl4pPr>
-            <a:lvl5pPr marL="1828800" indent="0" algn="ctr" defTabSz="914400" rtl="0" eaLnBrk="1" latinLnBrk="0" hangingPunct="1">
-              <a:spcBef>
-                <a:spcPct val="20000"/>
-              </a:spcBef>
-              <a:buFont typeface="Arial" pitchFamily="34" charset="0"/>
-              <a:buNone/>
-              <a:defRPr sz="2000" kern="1200">
-                <a:solidFill>
-                  <a:schemeClr val="tx1">
-                    <a:tint val="75000"/>
-                  </a:schemeClr>
-                </a:solidFill>
-                <a:latin typeface="+mn-lt"/>
-                <a:ea typeface="+mn-ea"/>
-                <a:cs typeface="+mn-cs"/>
-              </a:defRPr>
-            </a:lvl5pPr>
-            <a:lvl6pPr marL="2286000" indent="0" algn="ctr" defTabSz="914400" rtl="0" eaLnBrk="1" latinLnBrk="0" hangingPunct="1">
-              <a:spcBef>
-                <a:spcPct val="20000"/>
-              </a:spcBef>
-              <a:buFont typeface="Arial" pitchFamily="34" charset="0"/>
-              <a:buNone/>
-              <a:defRPr sz="2000" kern="1200">
-                <a:solidFill>
-                  <a:schemeClr val="tx1">
-                    <a:tint val="75000"/>
-                  </a:schemeClr>
-                </a:solidFill>
-                <a:latin typeface="+mn-lt"/>
-                <a:ea typeface="+mn-ea"/>
-                <a:cs typeface="+mn-cs"/>
-              </a:defRPr>
-            </a:lvl6pPr>
-            <a:lvl7pPr marL="2743200" indent="0" algn="ctr" defTabSz="914400" rtl="0" eaLnBrk="1" latinLnBrk="0" hangingPunct="1">
-              <a:spcBef>
-                <a:spcPct val="20000"/>
-              </a:spcBef>
-              <a:buFont typeface="Arial" pitchFamily="34" charset="0"/>
-              <a:buNone/>
-              <a:defRPr sz="2000" kern="1200">
-                <a:solidFill>
-                  <a:schemeClr val="tx1">
-                    <a:tint val="75000"/>
-                  </a:schemeClr>
-                </a:solidFill>
-                <a:latin typeface="+mn-lt"/>
-                <a:ea typeface="+mn-ea"/>
-                <a:cs typeface="+mn-cs"/>
-              </a:defRPr>
-            </a:lvl7pPr>
-            <a:lvl8pPr marL="3200400" indent="0" algn="ctr" defTabSz="914400" rtl="0" eaLnBrk="1" latinLnBrk="0" hangingPunct="1">
-              <a:spcBef>
-                <a:spcPct val="20000"/>
-              </a:spcBef>
-              <a:buFont typeface="Arial" pitchFamily="34" charset="0"/>
-              <a:buNone/>
-              <a:defRPr sz="2000" kern="1200">
-                <a:solidFill>
-                  <a:schemeClr val="tx1">
-                    <a:tint val="75000"/>
-                  </a:schemeClr>
-                </a:solidFill>
-                <a:latin typeface="+mn-lt"/>
-                <a:ea typeface="+mn-ea"/>
-                <a:cs typeface="+mn-cs"/>
-              </a:defRPr>
-            </a:lvl8pPr>
-            <a:lvl9pPr marL="3657600" indent="0" algn="ctr" defTabSz="914400" rtl="0" eaLnBrk="1" latinLnBrk="0" hangingPunct="1">
-              <a:spcBef>
-                <a:spcPct val="20000"/>
-              </a:spcBef>
-              <a:buFont typeface="Arial" pitchFamily="34" charset="0"/>
-              <a:buNone/>
-              <a:defRPr sz="2000" kern="1200">
-                <a:solidFill>
-                  <a:schemeClr val="tx1">
-                    <a:tint val="75000"/>
-                  </a:schemeClr>
-                </a:solidFill>
-                <a:latin typeface="+mn-lt"/>
-                <a:ea typeface="+mn-ea"/>
-                <a:cs typeface="+mn-cs"/>
-              </a:defRPr>
-            </a:lvl9pPr>
-          </a:lstStyle>
-          <a:p>
-            <a:pPr>
-              <a:spcBef>
-                <a:spcPts val="600"/>
-              </a:spcBef>
-            </a:pPr>
-            <a:r>
-              <a:rPr lang="en-GB" sz="4000" dirty="0">
-                <a:solidFill>
-                  <a:schemeClr val="bg1"/>
-                </a:solidFill>
-              </a:rPr>
-              <a:t>Now I've found the greatest love of all is mine</a:t>
-            </a:r>
-          </a:p>
-          <a:p>
-            <a:pPr>
-              <a:spcBef>
-                <a:spcPts val="600"/>
-              </a:spcBef>
-            </a:pPr>
-            <a:r>
-              <a:rPr lang="en-GB" sz="4000" dirty="0">
-                <a:solidFill>
-                  <a:schemeClr val="bg1"/>
-                </a:solidFill>
-              </a:rPr>
-              <a:t>Since You laid down Your life</a:t>
-            </a:r>
-          </a:p>
-          <a:p>
-            <a:pPr>
-              <a:spcBef>
-                <a:spcPts val="600"/>
-              </a:spcBef>
-            </a:pPr>
-            <a:r>
-              <a:rPr lang="en-GB" sz="4000" dirty="0">
-                <a:solidFill>
-                  <a:schemeClr val="bg1"/>
-                </a:solidFill>
-              </a:rPr>
-              <a:t>The greatest sacrifice</a:t>
+              <a:t>2/2</a:t>
             </a:r>
           </a:p>
         </p:txBody>
@@ -4420,717 +3507,7 @@
     </p:spTree>
     <p:extLst>
       <p:ext uri="{BB962C8B-B14F-4D97-AF65-F5344CB8AC3E}">
-        <p14:creationId xmlns:p14="http://schemas.microsoft.com/office/powerpoint/2010/main" val="1160475665"/>
-      </p:ext>
-    </p:extLst>
-  </p:cSld>
-  <p:clrMapOvr>
-    <a:masterClrMapping/>
-  </p:clrMapOvr>
-</p:sld>
-</file>
-
-<file path=ppt/slides/slide4.xml><?xml version="1.0" encoding="utf-8"?>
-<p:sld xmlns:a="http://schemas.openxmlformats.org/drawingml/2006/main" xmlns:r="http://schemas.openxmlformats.org/officeDocument/2006/relationships" xmlns:p="http://schemas.openxmlformats.org/presentationml/2006/main">
-  <p:cSld>
-    <p:spTree>
-      <p:nvGrpSpPr>
-        <p:cNvPr id="1" name="">
-          <a:extLst>
-            <a:ext uri="{FF2B5EF4-FFF2-40B4-BE49-F238E27FC236}">
-              <a16:creationId xmlns:a16="http://schemas.microsoft.com/office/drawing/2014/main" id="{3D1E7B9C-F9A1-7659-93D2-3F64E265F70C}"/>
-            </a:ext>
-          </a:extLst>
-        </p:cNvPr>
-        <p:cNvGrpSpPr/>
-        <p:nvPr/>
-      </p:nvGrpSpPr>
-      <p:grpSpPr>
-        <a:xfrm>
-          <a:off x="0" y="0"/>
-          <a:ext cx="0" cy="0"/>
-          <a:chOff x="0" y="0"/>
-          <a:chExt cx="0" cy="0"/>
-        </a:xfrm>
-      </p:grpSpPr>
-      <p:sp>
-        <p:nvSpPr>
-          <p:cNvPr id="2" name="TextBox 1">
-            <a:extLst>
-              <a:ext uri="{FF2B5EF4-FFF2-40B4-BE49-F238E27FC236}">
-                <a16:creationId xmlns:a16="http://schemas.microsoft.com/office/drawing/2014/main" id="{01D2047C-B9B6-B5E7-3C3E-A87CC472E819}"/>
-              </a:ext>
-            </a:extLst>
-          </p:cNvPr>
-          <p:cNvSpPr txBox="1"/>
-          <p:nvPr/>
-        </p:nvSpPr>
-        <p:spPr>
-          <a:xfrm>
-            <a:off x="8316416" y="0"/>
-            <a:ext cx="628698" cy="461665"/>
-          </a:xfrm>
-          <a:prstGeom prst="rect">
-            <a:avLst/>
-          </a:prstGeom>
-          <a:noFill/>
-        </p:spPr>
-        <p:txBody>
-          <a:bodyPr wrap="none" rtlCol="0">
-            <a:spAutoFit/>
-          </a:bodyPr>
-          <a:lstStyle/>
-          <a:p>
-            <a:r>
-              <a:rPr lang="en-GB" sz="2400" b="1" dirty="0">
-                <a:solidFill>
-                  <a:schemeClr val="bg1"/>
-                </a:solidFill>
-              </a:rPr>
-              <a:t>3/4</a:t>
-            </a:r>
-          </a:p>
-        </p:txBody>
-      </p:sp>
-      <p:sp>
-        <p:nvSpPr>
-          <p:cNvPr id="3" name="Subtitle 2">
-            <a:extLst>
-              <a:ext uri="{FF2B5EF4-FFF2-40B4-BE49-F238E27FC236}">
-                <a16:creationId xmlns:a16="http://schemas.microsoft.com/office/drawing/2014/main" id="{910E4131-5B5F-4093-3569-C0A497326507}"/>
-              </a:ext>
-            </a:extLst>
-          </p:cNvPr>
-          <p:cNvSpPr txBox="1">
-            <a:spLocks/>
-          </p:cNvSpPr>
-          <p:nvPr/>
-        </p:nvSpPr>
-        <p:spPr>
-          <a:xfrm>
-            <a:off x="251520" y="620688"/>
-            <a:ext cx="8640960" cy="6480720"/>
-          </a:xfrm>
-          <a:prstGeom prst="rect">
-            <a:avLst/>
-          </a:prstGeom>
-        </p:spPr>
-        <p:txBody>
-          <a:bodyPr vert="horz" lIns="91440" tIns="45720" rIns="91440" bIns="45720" rtlCol="0">
-            <a:noAutofit/>
-          </a:bodyPr>
-          <a:lstStyle>
-            <a:lvl1pPr marL="0" indent="0" algn="ctr" defTabSz="914400" rtl="0" eaLnBrk="1" latinLnBrk="0" hangingPunct="1">
-              <a:spcBef>
-                <a:spcPct val="20000"/>
-              </a:spcBef>
-              <a:buFont typeface="Arial" pitchFamily="34" charset="0"/>
-              <a:buNone/>
-              <a:defRPr sz="3200" kern="1200">
-                <a:solidFill>
-                  <a:schemeClr val="tx1">
-                    <a:tint val="75000"/>
-                  </a:schemeClr>
-                </a:solidFill>
-                <a:latin typeface="+mn-lt"/>
-                <a:ea typeface="+mn-ea"/>
-                <a:cs typeface="+mn-cs"/>
-              </a:defRPr>
-            </a:lvl1pPr>
-            <a:lvl2pPr marL="457200" indent="0" algn="ctr" defTabSz="914400" rtl="0" eaLnBrk="1" latinLnBrk="0" hangingPunct="1">
-              <a:spcBef>
-                <a:spcPct val="20000"/>
-              </a:spcBef>
-              <a:buFont typeface="Arial" pitchFamily="34" charset="0"/>
-              <a:buNone/>
-              <a:defRPr sz="2800" kern="1200">
-                <a:solidFill>
-                  <a:schemeClr val="tx1">
-                    <a:tint val="75000"/>
-                  </a:schemeClr>
-                </a:solidFill>
-                <a:latin typeface="+mn-lt"/>
-                <a:ea typeface="+mn-ea"/>
-                <a:cs typeface="+mn-cs"/>
-              </a:defRPr>
-            </a:lvl2pPr>
-            <a:lvl3pPr marL="914400" indent="0" algn="ctr" defTabSz="914400" rtl="0" eaLnBrk="1" latinLnBrk="0" hangingPunct="1">
-              <a:spcBef>
-                <a:spcPct val="20000"/>
-              </a:spcBef>
-              <a:buFont typeface="Arial" pitchFamily="34" charset="0"/>
-              <a:buNone/>
-              <a:defRPr sz="2400" kern="1200">
-                <a:solidFill>
-                  <a:schemeClr val="tx1">
-                    <a:tint val="75000"/>
-                  </a:schemeClr>
-                </a:solidFill>
-                <a:latin typeface="+mn-lt"/>
-                <a:ea typeface="+mn-ea"/>
-                <a:cs typeface="+mn-cs"/>
-              </a:defRPr>
-            </a:lvl3pPr>
-            <a:lvl4pPr marL="1371600" indent="0" algn="ctr" defTabSz="914400" rtl="0" eaLnBrk="1" latinLnBrk="0" hangingPunct="1">
-              <a:spcBef>
-                <a:spcPct val="20000"/>
-              </a:spcBef>
-              <a:buFont typeface="Arial" pitchFamily="34" charset="0"/>
-              <a:buNone/>
-              <a:defRPr sz="2000" kern="1200">
-                <a:solidFill>
-                  <a:schemeClr val="tx1">
-                    <a:tint val="75000"/>
-                  </a:schemeClr>
-                </a:solidFill>
-                <a:latin typeface="+mn-lt"/>
-                <a:ea typeface="+mn-ea"/>
-                <a:cs typeface="+mn-cs"/>
-              </a:defRPr>
-            </a:lvl4pPr>
-            <a:lvl5pPr marL="1828800" indent="0" algn="ctr" defTabSz="914400" rtl="0" eaLnBrk="1" latinLnBrk="0" hangingPunct="1">
-              <a:spcBef>
-                <a:spcPct val="20000"/>
-              </a:spcBef>
-              <a:buFont typeface="Arial" pitchFamily="34" charset="0"/>
-              <a:buNone/>
-              <a:defRPr sz="2000" kern="1200">
-                <a:solidFill>
-                  <a:schemeClr val="tx1">
-                    <a:tint val="75000"/>
-                  </a:schemeClr>
-                </a:solidFill>
-                <a:latin typeface="+mn-lt"/>
-                <a:ea typeface="+mn-ea"/>
-                <a:cs typeface="+mn-cs"/>
-              </a:defRPr>
-            </a:lvl5pPr>
-            <a:lvl6pPr marL="2286000" indent="0" algn="ctr" defTabSz="914400" rtl="0" eaLnBrk="1" latinLnBrk="0" hangingPunct="1">
-              <a:spcBef>
-                <a:spcPct val="20000"/>
-              </a:spcBef>
-              <a:buFont typeface="Arial" pitchFamily="34" charset="0"/>
-              <a:buNone/>
-              <a:defRPr sz="2000" kern="1200">
-                <a:solidFill>
-                  <a:schemeClr val="tx1">
-                    <a:tint val="75000"/>
-                  </a:schemeClr>
-                </a:solidFill>
-                <a:latin typeface="+mn-lt"/>
-                <a:ea typeface="+mn-ea"/>
-                <a:cs typeface="+mn-cs"/>
-              </a:defRPr>
-            </a:lvl6pPr>
-            <a:lvl7pPr marL="2743200" indent="0" algn="ctr" defTabSz="914400" rtl="0" eaLnBrk="1" latinLnBrk="0" hangingPunct="1">
-              <a:spcBef>
-                <a:spcPct val="20000"/>
-              </a:spcBef>
-              <a:buFont typeface="Arial" pitchFamily="34" charset="0"/>
-              <a:buNone/>
-              <a:defRPr sz="2000" kern="1200">
-                <a:solidFill>
-                  <a:schemeClr val="tx1">
-                    <a:tint val="75000"/>
-                  </a:schemeClr>
-                </a:solidFill>
-                <a:latin typeface="+mn-lt"/>
-                <a:ea typeface="+mn-ea"/>
-                <a:cs typeface="+mn-cs"/>
-              </a:defRPr>
-            </a:lvl7pPr>
-            <a:lvl8pPr marL="3200400" indent="0" algn="ctr" defTabSz="914400" rtl="0" eaLnBrk="1" latinLnBrk="0" hangingPunct="1">
-              <a:spcBef>
-                <a:spcPct val="20000"/>
-              </a:spcBef>
-              <a:buFont typeface="Arial" pitchFamily="34" charset="0"/>
-              <a:buNone/>
-              <a:defRPr sz="2000" kern="1200">
-                <a:solidFill>
-                  <a:schemeClr val="tx1">
-                    <a:tint val="75000"/>
-                  </a:schemeClr>
-                </a:solidFill>
-                <a:latin typeface="+mn-lt"/>
-                <a:ea typeface="+mn-ea"/>
-                <a:cs typeface="+mn-cs"/>
-              </a:defRPr>
-            </a:lvl8pPr>
-            <a:lvl9pPr marL="3657600" indent="0" algn="ctr" defTabSz="914400" rtl="0" eaLnBrk="1" latinLnBrk="0" hangingPunct="1">
-              <a:spcBef>
-                <a:spcPct val="20000"/>
-              </a:spcBef>
-              <a:buFont typeface="Arial" pitchFamily="34" charset="0"/>
-              <a:buNone/>
-              <a:defRPr sz="2000" kern="1200">
-                <a:solidFill>
-                  <a:schemeClr val="tx1">
-                    <a:tint val="75000"/>
-                  </a:schemeClr>
-                </a:solidFill>
-                <a:latin typeface="+mn-lt"/>
-                <a:ea typeface="+mn-ea"/>
-                <a:cs typeface="+mn-cs"/>
-              </a:defRPr>
-            </a:lvl9pPr>
-          </a:lstStyle>
-          <a:p>
-            <a:pPr>
-              <a:spcBef>
-                <a:spcPts val="600"/>
-              </a:spcBef>
-            </a:pPr>
-            <a:r>
-              <a:rPr lang="en-GB" sz="4000" dirty="0">
-                <a:solidFill>
-                  <a:schemeClr val="bg1"/>
-                </a:solidFill>
-              </a:rPr>
-              <a:t>Majesty majesty</a:t>
-            </a:r>
-          </a:p>
-          <a:p>
-            <a:pPr>
-              <a:spcBef>
-                <a:spcPts val="600"/>
-              </a:spcBef>
-            </a:pPr>
-            <a:r>
-              <a:rPr lang="en-GB" sz="4000" dirty="0">
-                <a:solidFill>
-                  <a:schemeClr val="bg1"/>
-                </a:solidFill>
-              </a:rPr>
-              <a:t>Your grace has found me just as I am</a:t>
-            </a:r>
-          </a:p>
-          <a:p>
-            <a:pPr>
-              <a:spcBef>
-                <a:spcPts val="600"/>
-              </a:spcBef>
-            </a:pPr>
-            <a:r>
-              <a:rPr lang="en-GB" sz="4000" dirty="0">
-                <a:solidFill>
-                  <a:schemeClr val="bg1"/>
-                </a:solidFill>
-              </a:rPr>
-              <a:t>Empty handed but alive in Your hands</a:t>
-            </a:r>
-          </a:p>
-          <a:p>
-            <a:pPr>
-              <a:spcBef>
-                <a:spcPts val="600"/>
-              </a:spcBef>
-            </a:pPr>
-            <a:endParaRPr lang="en-GB" sz="4000" dirty="0">
-              <a:solidFill>
-                <a:schemeClr val="bg1"/>
-              </a:solidFill>
-            </a:endParaRPr>
-          </a:p>
-          <a:p>
-            <a:pPr>
-              <a:spcBef>
-                <a:spcPts val="600"/>
-              </a:spcBef>
-            </a:pPr>
-            <a:r>
-              <a:rPr lang="en-GB" sz="4000" dirty="0">
-                <a:solidFill>
-                  <a:schemeClr val="bg1"/>
-                </a:solidFill>
-              </a:rPr>
-              <a:t>Majesty majesty</a:t>
-            </a:r>
-          </a:p>
-          <a:p>
-            <a:pPr>
-              <a:spcBef>
-                <a:spcPts val="600"/>
-              </a:spcBef>
-            </a:pPr>
-            <a:r>
-              <a:rPr lang="en-GB" sz="4000" dirty="0">
-                <a:solidFill>
-                  <a:schemeClr val="bg1"/>
-                </a:solidFill>
-              </a:rPr>
-              <a:t>Forever I am changed by Your love</a:t>
-            </a:r>
-          </a:p>
-          <a:p>
-            <a:pPr>
-              <a:spcBef>
-                <a:spcPts val="600"/>
-              </a:spcBef>
-            </a:pPr>
-            <a:r>
-              <a:rPr lang="en-GB" sz="4000" dirty="0">
-                <a:solidFill>
-                  <a:schemeClr val="bg1"/>
-                </a:solidFill>
-              </a:rPr>
-              <a:t>In the presence of Your majesty</a:t>
-            </a:r>
-          </a:p>
-        </p:txBody>
-      </p:sp>
-    </p:spTree>
-    <p:extLst>
-      <p:ext uri="{BB962C8B-B14F-4D97-AF65-F5344CB8AC3E}">
-        <p14:creationId xmlns:p14="http://schemas.microsoft.com/office/powerpoint/2010/main" val="578912917"/>
-      </p:ext>
-    </p:extLst>
-  </p:cSld>
-  <p:clrMapOvr>
-    <a:masterClrMapping/>
-  </p:clrMapOvr>
-</p:sld>
-</file>
-
-<file path=ppt/slides/slide5.xml><?xml version="1.0" encoding="utf-8"?>
-<p:sld xmlns:a="http://schemas.openxmlformats.org/drawingml/2006/main" xmlns:r="http://schemas.openxmlformats.org/officeDocument/2006/relationships" xmlns:p="http://schemas.openxmlformats.org/presentationml/2006/main">
-  <p:cSld>
-    <p:spTree>
-      <p:nvGrpSpPr>
-        <p:cNvPr id="1" name="">
-          <a:extLst>
-            <a:ext uri="{FF2B5EF4-FFF2-40B4-BE49-F238E27FC236}">
-              <a16:creationId xmlns:a16="http://schemas.microsoft.com/office/drawing/2014/main" id="{3D1E7B9C-F9A1-7659-93D2-3F64E265F70C}"/>
-            </a:ext>
-          </a:extLst>
-        </p:cNvPr>
-        <p:cNvGrpSpPr/>
-        <p:nvPr/>
-      </p:nvGrpSpPr>
-      <p:grpSpPr>
-        <a:xfrm>
-          <a:off x="0" y="0"/>
-          <a:ext cx="0" cy="0"/>
-          <a:chOff x="0" y="0"/>
-          <a:chExt cx="0" cy="0"/>
-        </a:xfrm>
-      </p:grpSpPr>
-      <p:sp>
-        <p:nvSpPr>
-          <p:cNvPr id="2" name="TextBox 1">
-            <a:extLst>
-              <a:ext uri="{FF2B5EF4-FFF2-40B4-BE49-F238E27FC236}">
-                <a16:creationId xmlns:a16="http://schemas.microsoft.com/office/drawing/2014/main" id="{01D2047C-B9B6-B5E7-3C3E-A87CC472E819}"/>
-              </a:ext>
-            </a:extLst>
-          </p:cNvPr>
-          <p:cNvSpPr txBox="1"/>
-          <p:nvPr/>
-        </p:nvSpPr>
-        <p:spPr>
-          <a:xfrm>
-            <a:off x="8316416" y="0"/>
-            <a:ext cx="628698" cy="461665"/>
-          </a:xfrm>
-          <a:prstGeom prst="rect">
-            <a:avLst/>
-          </a:prstGeom>
-          <a:noFill/>
-        </p:spPr>
-        <p:txBody>
-          <a:bodyPr wrap="none" rtlCol="0">
-            <a:spAutoFit/>
-          </a:bodyPr>
-          <a:lstStyle/>
-          <a:p>
-            <a:r>
-              <a:rPr lang="en-GB" sz="2400" b="1" dirty="0">
-                <a:solidFill>
-                  <a:schemeClr val="bg1"/>
-                </a:solidFill>
-              </a:rPr>
-              <a:t>4/4</a:t>
-            </a:r>
-          </a:p>
-        </p:txBody>
-      </p:sp>
-      <p:sp>
-        <p:nvSpPr>
-          <p:cNvPr id="3" name="Subtitle 2">
-            <a:extLst>
-              <a:ext uri="{FF2B5EF4-FFF2-40B4-BE49-F238E27FC236}">
-                <a16:creationId xmlns:a16="http://schemas.microsoft.com/office/drawing/2014/main" id="{910E4131-5B5F-4093-3569-C0A497326507}"/>
-              </a:ext>
-            </a:extLst>
-          </p:cNvPr>
-          <p:cNvSpPr txBox="1">
-            <a:spLocks/>
-          </p:cNvSpPr>
-          <p:nvPr/>
-        </p:nvSpPr>
-        <p:spPr>
-          <a:xfrm>
-            <a:off x="251520" y="620688"/>
-            <a:ext cx="8640960" cy="6480720"/>
-          </a:xfrm>
-          <a:prstGeom prst="rect">
-            <a:avLst/>
-          </a:prstGeom>
-        </p:spPr>
-        <p:txBody>
-          <a:bodyPr vert="horz" lIns="91440" tIns="45720" rIns="91440" bIns="45720" rtlCol="0">
-            <a:noAutofit/>
-          </a:bodyPr>
-          <a:lstStyle>
-            <a:lvl1pPr marL="0" indent="0" algn="ctr" defTabSz="914400" rtl="0" eaLnBrk="1" latinLnBrk="0" hangingPunct="1">
-              <a:spcBef>
-                <a:spcPct val="20000"/>
-              </a:spcBef>
-              <a:buFont typeface="Arial" pitchFamily="34" charset="0"/>
-              <a:buNone/>
-              <a:defRPr sz="3200" kern="1200">
-                <a:solidFill>
-                  <a:schemeClr val="tx1">
-                    <a:tint val="75000"/>
-                  </a:schemeClr>
-                </a:solidFill>
-                <a:latin typeface="+mn-lt"/>
-                <a:ea typeface="+mn-ea"/>
-                <a:cs typeface="+mn-cs"/>
-              </a:defRPr>
-            </a:lvl1pPr>
-            <a:lvl2pPr marL="457200" indent="0" algn="ctr" defTabSz="914400" rtl="0" eaLnBrk="1" latinLnBrk="0" hangingPunct="1">
-              <a:spcBef>
-                <a:spcPct val="20000"/>
-              </a:spcBef>
-              <a:buFont typeface="Arial" pitchFamily="34" charset="0"/>
-              <a:buNone/>
-              <a:defRPr sz="2800" kern="1200">
-                <a:solidFill>
-                  <a:schemeClr val="tx1">
-                    <a:tint val="75000"/>
-                  </a:schemeClr>
-                </a:solidFill>
-                <a:latin typeface="+mn-lt"/>
-                <a:ea typeface="+mn-ea"/>
-                <a:cs typeface="+mn-cs"/>
-              </a:defRPr>
-            </a:lvl2pPr>
-            <a:lvl3pPr marL="914400" indent="0" algn="ctr" defTabSz="914400" rtl="0" eaLnBrk="1" latinLnBrk="0" hangingPunct="1">
-              <a:spcBef>
-                <a:spcPct val="20000"/>
-              </a:spcBef>
-              <a:buFont typeface="Arial" pitchFamily="34" charset="0"/>
-              <a:buNone/>
-              <a:defRPr sz="2400" kern="1200">
-                <a:solidFill>
-                  <a:schemeClr val="tx1">
-                    <a:tint val="75000"/>
-                  </a:schemeClr>
-                </a:solidFill>
-                <a:latin typeface="+mn-lt"/>
-                <a:ea typeface="+mn-ea"/>
-                <a:cs typeface="+mn-cs"/>
-              </a:defRPr>
-            </a:lvl3pPr>
-            <a:lvl4pPr marL="1371600" indent="0" algn="ctr" defTabSz="914400" rtl="0" eaLnBrk="1" latinLnBrk="0" hangingPunct="1">
-              <a:spcBef>
-                <a:spcPct val="20000"/>
-              </a:spcBef>
-              <a:buFont typeface="Arial" pitchFamily="34" charset="0"/>
-              <a:buNone/>
-              <a:defRPr sz="2000" kern="1200">
-                <a:solidFill>
-                  <a:schemeClr val="tx1">
-                    <a:tint val="75000"/>
-                  </a:schemeClr>
-                </a:solidFill>
-                <a:latin typeface="+mn-lt"/>
-                <a:ea typeface="+mn-ea"/>
-                <a:cs typeface="+mn-cs"/>
-              </a:defRPr>
-            </a:lvl4pPr>
-            <a:lvl5pPr marL="1828800" indent="0" algn="ctr" defTabSz="914400" rtl="0" eaLnBrk="1" latinLnBrk="0" hangingPunct="1">
-              <a:spcBef>
-                <a:spcPct val="20000"/>
-              </a:spcBef>
-              <a:buFont typeface="Arial" pitchFamily="34" charset="0"/>
-              <a:buNone/>
-              <a:defRPr sz="2000" kern="1200">
-                <a:solidFill>
-                  <a:schemeClr val="tx1">
-                    <a:tint val="75000"/>
-                  </a:schemeClr>
-                </a:solidFill>
-                <a:latin typeface="+mn-lt"/>
-                <a:ea typeface="+mn-ea"/>
-                <a:cs typeface="+mn-cs"/>
-              </a:defRPr>
-            </a:lvl5pPr>
-            <a:lvl6pPr marL="2286000" indent="0" algn="ctr" defTabSz="914400" rtl="0" eaLnBrk="1" latinLnBrk="0" hangingPunct="1">
-              <a:spcBef>
-                <a:spcPct val="20000"/>
-              </a:spcBef>
-              <a:buFont typeface="Arial" pitchFamily="34" charset="0"/>
-              <a:buNone/>
-              <a:defRPr sz="2000" kern="1200">
-                <a:solidFill>
-                  <a:schemeClr val="tx1">
-                    <a:tint val="75000"/>
-                  </a:schemeClr>
-                </a:solidFill>
-                <a:latin typeface="+mn-lt"/>
-                <a:ea typeface="+mn-ea"/>
-                <a:cs typeface="+mn-cs"/>
-              </a:defRPr>
-            </a:lvl6pPr>
-            <a:lvl7pPr marL="2743200" indent="0" algn="ctr" defTabSz="914400" rtl="0" eaLnBrk="1" latinLnBrk="0" hangingPunct="1">
-              <a:spcBef>
-                <a:spcPct val="20000"/>
-              </a:spcBef>
-              <a:buFont typeface="Arial" pitchFamily="34" charset="0"/>
-              <a:buNone/>
-              <a:defRPr sz="2000" kern="1200">
-                <a:solidFill>
-                  <a:schemeClr val="tx1">
-                    <a:tint val="75000"/>
-                  </a:schemeClr>
-                </a:solidFill>
-                <a:latin typeface="+mn-lt"/>
-                <a:ea typeface="+mn-ea"/>
-                <a:cs typeface="+mn-cs"/>
-              </a:defRPr>
-            </a:lvl7pPr>
-            <a:lvl8pPr marL="3200400" indent="0" algn="ctr" defTabSz="914400" rtl="0" eaLnBrk="1" latinLnBrk="0" hangingPunct="1">
-              <a:spcBef>
-                <a:spcPct val="20000"/>
-              </a:spcBef>
-              <a:buFont typeface="Arial" pitchFamily="34" charset="0"/>
-              <a:buNone/>
-              <a:defRPr sz="2000" kern="1200">
-                <a:solidFill>
-                  <a:schemeClr val="tx1">
-                    <a:tint val="75000"/>
-                  </a:schemeClr>
-                </a:solidFill>
-                <a:latin typeface="+mn-lt"/>
-                <a:ea typeface="+mn-ea"/>
-                <a:cs typeface="+mn-cs"/>
-              </a:defRPr>
-            </a:lvl8pPr>
-            <a:lvl9pPr marL="3657600" indent="0" algn="ctr" defTabSz="914400" rtl="0" eaLnBrk="1" latinLnBrk="0" hangingPunct="1">
-              <a:spcBef>
-                <a:spcPct val="20000"/>
-              </a:spcBef>
-              <a:buFont typeface="Arial" pitchFamily="34" charset="0"/>
-              <a:buNone/>
-              <a:defRPr sz="2000" kern="1200">
-                <a:solidFill>
-                  <a:schemeClr val="tx1">
-                    <a:tint val="75000"/>
-                  </a:schemeClr>
-                </a:solidFill>
-                <a:latin typeface="+mn-lt"/>
-                <a:ea typeface="+mn-ea"/>
-                <a:cs typeface="+mn-cs"/>
-              </a:defRPr>
-            </a:lvl9pPr>
-          </a:lstStyle>
-          <a:p>
-            <a:pPr>
-              <a:spcBef>
-                <a:spcPts val="600"/>
-              </a:spcBef>
-            </a:pPr>
-            <a:r>
-              <a:rPr lang="en-GB" sz="4000" dirty="0">
-                <a:solidFill>
-                  <a:schemeClr val="bg1"/>
-                </a:solidFill>
-              </a:rPr>
-              <a:t>Here I am</a:t>
-            </a:r>
-          </a:p>
-          <a:p>
-            <a:pPr>
-              <a:spcBef>
-                <a:spcPts val="600"/>
-              </a:spcBef>
-            </a:pPr>
-            <a:r>
-              <a:rPr lang="en-GB" sz="4000" dirty="0">
-                <a:solidFill>
-                  <a:schemeClr val="bg1"/>
-                </a:solidFill>
-              </a:rPr>
-              <a:t>Humbled by the love that You give</a:t>
-            </a:r>
-          </a:p>
-          <a:p>
-            <a:pPr>
-              <a:spcBef>
-                <a:spcPts val="600"/>
-              </a:spcBef>
-            </a:pPr>
-            <a:r>
-              <a:rPr lang="en-GB" sz="4000" dirty="0">
-                <a:solidFill>
-                  <a:schemeClr val="bg1"/>
-                </a:solidFill>
-              </a:rPr>
-              <a:t>Forgiven so that I can forgive</a:t>
-            </a:r>
-          </a:p>
-          <a:p>
-            <a:pPr>
-              <a:spcBef>
-                <a:spcPts val="600"/>
-              </a:spcBef>
-            </a:pPr>
-            <a:r>
-              <a:rPr lang="en-GB" sz="4000" dirty="0">
-                <a:solidFill>
-                  <a:schemeClr val="bg1"/>
-                </a:solidFill>
-              </a:rPr>
-              <a:t>Here I stand</a:t>
-            </a:r>
-          </a:p>
-          <a:p>
-            <a:pPr>
-              <a:spcBef>
-                <a:spcPts val="600"/>
-              </a:spcBef>
-            </a:pPr>
-            <a:r>
-              <a:rPr lang="en-GB" sz="4000" dirty="0">
-                <a:solidFill>
-                  <a:schemeClr val="bg1"/>
-                </a:solidFill>
-              </a:rPr>
-              <a:t>Knowing that I'm Your desire</a:t>
-            </a:r>
-          </a:p>
-          <a:p>
-            <a:pPr>
-              <a:spcBef>
-                <a:spcPts val="600"/>
-              </a:spcBef>
-            </a:pPr>
-            <a:r>
-              <a:rPr lang="en-GB" sz="4000" dirty="0">
-                <a:solidFill>
-                  <a:schemeClr val="bg1"/>
-                </a:solidFill>
-              </a:rPr>
-              <a:t>Sanctified by glory and fire</a:t>
-            </a:r>
-          </a:p>
-        </p:txBody>
-      </p:sp>
-    </p:spTree>
-    <p:extLst>
-      <p:ext uri="{BB962C8B-B14F-4D97-AF65-F5344CB8AC3E}">
-        <p14:creationId xmlns:p14="http://schemas.microsoft.com/office/powerpoint/2010/main" val="688273248"/>
+        <p14:creationId xmlns:p14="http://schemas.microsoft.com/office/powerpoint/2010/main" val="365095133"/>
       </p:ext>
     </p:extLst>
   </p:cSld>
@@ -5421,299 +3798,4 @@
   <a:objectDefaults/>
   <a:extraClrSchemeLst/>
 </a:theme>
-</file>
-
-<file path=ppt/theme/theme2.xml><?xml version="1.0" encoding="utf-8"?>
-<a:theme xmlns:a="http://schemas.openxmlformats.org/drawingml/2006/main" name="Office Theme">
-  <a:themeElements>
-    <a:clrScheme name="Office">
-      <a:dk1>
-        <a:sysClr val="windowText" lastClr="000000"/>
-      </a:dk1>
-      <a:lt1>
-        <a:sysClr val="window" lastClr="FFFFFF"/>
-      </a:lt1>
-      <a:dk2>
-        <a:srgbClr val="44546A"/>
-      </a:dk2>
-      <a:lt2>
-        <a:srgbClr val="E7E6E6"/>
-      </a:lt2>
-      <a:accent1>
-        <a:srgbClr val="4472C4"/>
-      </a:accent1>
-      <a:accent2>
-        <a:srgbClr val="ED7D31"/>
-      </a:accent2>
-      <a:accent3>
-        <a:srgbClr val="A5A5A5"/>
-      </a:accent3>
-      <a:accent4>
-        <a:srgbClr val="FFC000"/>
-      </a:accent4>
-      <a:accent5>
-        <a:srgbClr val="5B9BD5"/>
-      </a:accent5>
-      <a:accent6>
-        <a:srgbClr val="70AD47"/>
-      </a:accent6>
-      <a:hlink>
-        <a:srgbClr val="0563C1"/>
-      </a:hlink>
-      <a:folHlink>
-        <a:srgbClr val="954F72"/>
-      </a:folHlink>
-    </a:clrScheme>
-    <a:fontScheme name="Office">
-      <a:majorFont>
-        <a:latin typeface="Calibri Light" panose="020F0302020204030204"/>
-        <a:ea typeface=""/>
-        <a:cs typeface=""/>
-        <a:font script="Jpan" typeface="游ゴシック Light"/>
-        <a:font script="Hang" typeface="맑은 고딕"/>
-        <a:font script="Hans" typeface="等线 Light"/>
-        <a:font script="Hant" typeface="新細明體"/>
-        <a:font script="Arab" typeface="Times New Roman"/>
-        <a:font script="Hebr" typeface="Times New Roman"/>
-        <a:font script="Thai" typeface="Angsana New"/>
-        <a:font script="Ethi" typeface="Nyala"/>
-        <a:font script="Beng" typeface="Vrinda"/>
-        <a:font script="Gujr" typeface="Shruti"/>
-        <a:font script="Khmr" typeface="MoolBoran"/>
-        <a:font script="Knda" typeface="Tunga"/>
-        <a:font script="Guru" typeface="Raavi"/>
-        <a:font script="Cans" typeface="Euphemia"/>
-        <a:font script="Cher" typeface="Plantagenet Cherokee"/>
-        <a:font script="Yiii" typeface="Microsoft Yi Baiti"/>
-        <a:font script="Tibt" typeface="Microsoft Himalaya"/>
-        <a:font script="Thaa" typeface="MV Boli"/>
-        <a:font script="Deva" typeface="Mangal"/>
-        <a:font script="Telu" typeface="Gautami"/>
-        <a:font script="Taml" typeface="Latha"/>
-        <a:font script="Syrc" typeface="Estrangelo Edessa"/>
-        <a:font script="Orya" typeface="Kalinga"/>
-        <a:font script="Mlym" typeface="Kartika"/>
-        <a:font script="Laoo" typeface="DokChampa"/>
-        <a:font script="Sinh" typeface="Iskoola Pota"/>
-        <a:font script="Mong" typeface="Mongolian Baiti"/>
-        <a:font script="Viet" typeface="Times New Roman"/>
-        <a:font script="Uigh" typeface="Microsoft Uighur"/>
-        <a:font script="Geor" typeface="Sylfaen"/>
-        <a:font script="Armn" typeface="Arial"/>
-        <a:font script="Bugi" typeface="Leelawadee UI"/>
-        <a:font script="Bopo" typeface="Microsoft JhengHei"/>
-        <a:font script="Java" typeface="Javanese Text"/>
-        <a:font script="Lisu" typeface="Segoe UI"/>
-        <a:font script="Mymr" typeface="Myanmar Text"/>
-        <a:font script="Nkoo" typeface="Ebrima"/>
-        <a:font script="Olck" typeface="Nirmala UI"/>
-        <a:font script="Osma" typeface="Ebrima"/>
-        <a:font script="Phag" typeface="Phagspa"/>
-        <a:font script="Syrn" typeface="Estrangelo Edessa"/>
-        <a:font script="Syrj" typeface="Estrangelo Edessa"/>
-        <a:font script="Syre" typeface="Estrangelo Edessa"/>
-        <a:font script="Sora" typeface="Nirmala UI"/>
-        <a:font script="Tale" typeface="Microsoft Tai Le"/>
-        <a:font script="Talu" typeface="Microsoft New Tai Lue"/>
-        <a:font script="Tfng" typeface="Ebrima"/>
-      </a:majorFont>
-      <a:minorFont>
-        <a:latin typeface="Calibri" panose="020F0502020204030204"/>
-        <a:ea typeface=""/>
-        <a:cs typeface=""/>
-        <a:font script="Jpan" typeface="游ゴシック"/>
-        <a:font script="Hang" typeface="맑은 고딕"/>
-        <a:font script="Hans" typeface="等线"/>
-        <a:font script="Hant" typeface="新細明體"/>
-        <a:font script="Arab" typeface="Arial"/>
-        <a:font script="Hebr" typeface="Arial"/>
-        <a:font script="Thai" typeface="Cordia New"/>
-        <a:font script="Ethi" typeface="Nyala"/>
-        <a:font script="Beng" typeface="Vrinda"/>
-        <a:font script="Gujr" typeface="Shruti"/>
-        <a:font script="Khmr" typeface="DaunPenh"/>
-        <a:font script="Knda" typeface="Tunga"/>
-        <a:font script="Guru" typeface="Raavi"/>
-        <a:font script="Cans" typeface="Euphemia"/>
-        <a:font script="Cher" typeface="Plantagenet Cherokee"/>
-        <a:font script="Yiii" typeface="Microsoft Yi Baiti"/>
-        <a:font script="Tibt" typeface="Microsoft Himalaya"/>
-        <a:font script="Thaa" typeface="MV Boli"/>
-        <a:font script="Deva" typeface="Mangal"/>
-        <a:font script="Telu" typeface="Gautami"/>
-        <a:font script="Taml" typeface="Latha"/>
-        <a:font script="Syrc" typeface="Estrangelo Edessa"/>
-        <a:font script="Orya" typeface="Kalinga"/>
-        <a:font script="Mlym" typeface="Kartika"/>
-        <a:font script="Laoo" typeface="DokChampa"/>
-        <a:font script="Sinh" typeface="Iskoola Pota"/>
-        <a:font script="Mong" typeface="Mongolian Baiti"/>
-        <a:font script="Viet" typeface="Arial"/>
-        <a:font script="Uigh" typeface="Microsoft Uighur"/>
-        <a:font script="Geor" typeface="Sylfaen"/>
-        <a:font script="Armn" typeface="Arial"/>
-        <a:font script="Bugi" typeface="Leelawadee UI"/>
-        <a:font script="Bopo" typeface="Microsoft JhengHei"/>
-        <a:font script="Java" typeface="Javanese Text"/>
-        <a:font script="Lisu" typeface="Segoe UI"/>
-        <a:font script="Mymr" typeface="Myanmar Text"/>
-        <a:font script="Nkoo" typeface="Ebrima"/>
-        <a:font script="Olck" typeface="Nirmala UI"/>
-        <a:font script="Osma" typeface="Ebrima"/>
-        <a:font script="Phag" typeface="Phagspa"/>
-        <a:font script="Syrn" typeface="Estrangelo Edessa"/>
-        <a:font script="Syrj" typeface="Estrangelo Edessa"/>
-        <a:font script="Syre" typeface="Estrangelo Edessa"/>
-        <a:font script="Sora" typeface="Nirmala UI"/>
-        <a:font script="Tale" typeface="Microsoft Tai Le"/>
-        <a:font script="Talu" typeface="Microsoft New Tai Lue"/>
-        <a:font script="Tfng" typeface="Ebrima"/>
-      </a:minorFont>
-    </a:fontScheme>
-    <a:fmtScheme name="Office">
-      <a:fillStyleLst>
-        <a:solidFill>
-          <a:schemeClr val="phClr"/>
-        </a:solidFill>
-        <a:gradFill rotWithShape="1">
-          <a:gsLst>
-            <a:gs pos="0">
-              <a:schemeClr val="phClr">
-                <a:lumMod val="110000"/>
-                <a:satMod val="105000"/>
-                <a:tint val="67000"/>
-              </a:schemeClr>
-            </a:gs>
-            <a:gs pos="50000">
-              <a:schemeClr val="phClr">
-                <a:lumMod val="105000"/>
-                <a:satMod val="103000"/>
-                <a:tint val="73000"/>
-              </a:schemeClr>
-            </a:gs>
-            <a:gs pos="100000">
-              <a:schemeClr val="phClr">
-                <a:lumMod val="105000"/>
-                <a:satMod val="109000"/>
-                <a:tint val="81000"/>
-              </a:schemeClr>
-            </a:gs>
-          </a:gsLst>
-          <a:lin ang="5400000" scaled="0"/>
-        </a:gradFill>
-        <a:gradFill rotWithShape="1">
-          <a:gsLst>
-            <a:gs pos="0">
-              <a:schemeClr val="phClr">
-                <a:satMod val="103000"/>
-                <a:lumMod val="102000"/>
-                <a:tint val="94000"/>
-              </a:schemeClr>
-            </a:gs>
-            <a:gs pos="50000">
-              <a:schemeClr val="phClr">
-                <a:satMod val="110000"/>
-                <a:lumMod val="100000"/>
-                <a:shade val="100000"/>
-              </a:schemeClr>
-            </a:gs>
-            <a:gs pos="100000">
-              <a:schemeClr val="phClr">
-                <a:lumMod val="99000"/>
-                <a:satMod val="120000"/>
-                <a:shade val="78000"/>
-              </a:schemeClr>
-            </a:gs>
-          </a:gsLst>
-          <a:lin ang="5400000" scaled="0"/>
-        </a:gradFill>
-      </a:fillStyleLst>
-      <a:lnStyleLst>
-        <a:ln w="6350" cap="flat" cmpd="sng" algn="ctr">
-          <a:solidFill>
-            <a:schemeClr val="phClr"/>
-          </a:solidFill>
-          <a:prstDash val="solid"/>
-          <a:miter lim="800000"/>
-        </a:ln>
-        <a:ln w="12700" cap="flat" cmpd="sng" algn="ctr">
-          <a:solidFill>
-            <a:schemeClr val="phClr"/>
-          </a:solidFill>
-          <a:prstDash val="solid"/>
-          <a:miter lim="800000"/>
-        </a:ln>
-        <a:ln w="19050" cap="flat" cmpd="sng" algn="ctr">
-          <a:solidFill>
-            <a:schemeClr val="phClr"/>
-          </a:solidFill>
-          <a:prstDash val="solid"/>
-          <a:miter lim="800000"/>
-        </a:ln>
-      </a:lnStyleLst>
-      <a:effectStyleLst>
-        <a:effectStyle>
-          <a:effectLst/>
-        </a:effectStyle>
-        <a:effectStyle>
-          <a:effectLst/>
-        </a:effectStyle>
-        <a:effectStyle>
-          <a:effectLst>
-            <a:outerShdw blurRad="57150" dist="19050" dir="5400000" algn="ctr" rotWithShape="0">
-              <a:srgbClr val="000000">
-                <a:alpha val="63000"/>
-              </a:srgbClr>
-            </a:outerShdw>
-          </a:effectLst>
-        </a:effectStyle>
-      </a:effectStyleLst>
-      <a:bgFillStyleLst>
-        <a:solidFill>
-          <a:schemeClr val="phClr"/>
-        </a:solidFill>
-        <a:solidFill>
-          <a:schemeClr val="phClr">
-            <a:tint val="95000"/>
-            <a:satMod val="170000"/>
-          </a:schemeClr>
-        </a:solidFill>
-        <a:gradFill rotWithShape="1">
-          <a:gsLst>
-            <a:gs pos="0">
-              <a:schemeClr val="phClr">
-                <a:tint val="93000"/>
-                <a:satMod val="150000"/>
-                <a:shade val="98000"/>
-                <a:lumMod val="102000"/>
-              </a:schemeClr>
-            </a:gs>
-            <a:gs pos="50000">
-              <a:schemeClr val="phClr">
-                <a:tint val="98000"/>
-                <a:satMod val="130000"/>
-                <a:shade val="90000"/>
-                <a:lumMod val="103000"/>
-              </a:schemeClr>
-            </a:gs>
-            <a:gs pos="100000">
-              <a:schemeClr val="phClr">
-                <a:shade val="63000"/>
-                <a:satMod val="120000"/>
-              </a:schemeClr>
-            </a:gs>
-          </a:gsLst>
-          <a:lin ang="5400000" scaled="0"/>
-        </a:gradFill>
-      </a:bgFillStyleLst>
-    </a:fmtScheme>
-  </a:themeElements>
-  <a:objectDefaults/>
-  <a:extraClrSchemeLst/>
-  <a:extLst>
-    <a:ext uri="{05A4C25C-085E-4340-85A3-A5531E510DB2}">
-      <thm15:themeFamily xmlns:thm15="http://schemas.microsoft.com/office/thememl/2012/main" name="Office Theme" id="{62F939B6-93AF-4DB8-9C6B-D6C7DFDC589F}" vid="{4A3C46E8-61CC-4603-A589-7422A47A8E4A}"/>
-    </a:ext>
-  </a:extLst>
-</a:theme>
 </file>